--- a/LungVision-AI-Presentation.pptx
+++ b/LungVision-AI-Presentation.pptx
@@ -8,6 +8,8 @@
     <p:sldId id="256" r:id="rId7"/>
     <p:sldId id="260" r:id="rId11"/>
     <p:sldId id="262" r:id="rId13"/>
+    <p:sldId id="263" r:id="rId14"/>
+    <p:sldId id="261" r:id="rId12"/>
     <p:sldId id="266" r:id="rId17"/>
     <p:sldId id="267" r:id="rId18"/>
     <p:sldId id="270" r:id="rId21"/>
@@ -511,7 +513,7 @@
           <a:lstStyle/>
           <a:p>
             <a:r>
-              <a:t>[00:00 - 00:30]  TITLE</a:t>
+              <a:t>[00:00 - 00:30]  TITLE            (thesis: title page)</a:t>
             </a:r>
           </a:p>
           <a:p/>
@@ -639,7 +641,7 @@
           <a:lstStyle/>
           <a:p>
             <a:r>
-              <a:t>[17:00 - 18:30]  CONCLUSION</a:t>
+              <a:t>[14:30 - 16:45]  RESULTS, CLASSIFICATION    (thesis: 5.1, 5.4)</a:t>
             </a:r>
           </a:p>
           <a:p/>
@@ -650,6 +652,459 @@
           </a:p>
           <a:p>
             <a:r>
+              <a:t>"DenseNet121 reached eighty five point three one per cent on the held out test</a:t>
+            </a:r>
+          </a:p>
+          <a:p>
+            <a:r>
+              <a:t>set, EfficientNetV2B3 eighty four point three zero, EfficientNetV2S eighty</a:t>
+            </a:r>
+          </a:p>
+          <a:p>
+            <a:r>
+              <a:t>point five four. DenseNet121 is the deployed model."</a:t>
+            </a:r>
+          </a:p>
+          <a:p/>
+          <a:p>
+            <a:r>
+              <a:t>Now immediately undercut the headline, this is the point of the slide:</a:t>
+            </a:r>
+          </a:p>
+          <a:p>
+            <a:r>
+              <a:t>"I want to be careful about that ranking. The lead over EfficientNetV2B3 is one</a:t>
+            </a:r>
+          </a:p>
+          <a:p>
+            <a:r>
+              <a:t>point zero one percentage points. On one thousand three hundred and eighty two</a:t>
+            </a:r>
+          </a:p>
+          <a:p>
+            <a:r>
+              <a:t>test images that is fourteen images, from a single run with no seed</a:t>
+            </a:r>
+          </a:p>
+          <a:p>
+            <a:r>
+              <a:t>replication. The methodology committed in advance to treating a difference at</a:t>
+            </a:r>
+          </a:p>
+          <a:p>
+            <a:r>
+              <a:t>that resolution as inconclusive, so I am not claiming DenseNet is the better</a:t>
+            </a:r>
+          </a:p>
+          <a:p>
+            <a:r>
+              <a:t>architecture."</a:t>
+            </a:r>
+          </a:p>
+          <a:p/>
+          <a:p>
+            <a:r>
+              <a:t>"And the third row is not an architectural result at all. EfficientNetV2S was</a:t>
+            </a:r>
+          </a:p>
+          <a:p>
+            <a:r>
+              <a:t>trained with simple rescaling to zero to one, while its ImageNet weights expect</a:t>
+            </a:r>
+          </a:p>
+          <a:p>
+            <a:r>
+              <a:t>minus one to one. The frozen phase shows the effect cleanly: sixty eight point</a:t>
+            </a:r>
+          </a:p>
+          <a:p>
+            <a:r>
+              <a:t>zero seven per cent against eighty three point two zero. That is a</a:t>
+            </a:r>
+          </a:p>
+          <a:p>
+            <a:r>
+              <a:t>preprocessing fault, not a capacity difference, and I have disclosed it rather</a:t>
+            </a:r>
+          </a:p>
+          <a:p>
+            <a:r>
+              <a:t>than quietly dropping the row."</a:t>
+            </a:r>
+          </a:p>
+          <a:p/>
+          <a:p>
+            <a:r>
+              <a:t>"The error structure is the more useful finding. Between sixty nine and seventy</a:t>
+            </a:r>
+          </a:p>
+          <a:p>
+            <a:r>
+              <a:t>six per cent of every model's errors are the same single confusion, bacterial</a:t>
+            </a:r>
+          </a:p>
+          <a:p>
+            <a:r>
+              <a:t>against viral pneumonia. Per class, DenseNet separates COVID-19 and Normal</a:t>
+            </a:r>
+          </a:p>
+          <a:p>
+            <a:r>
+              <a:t>almost perfectly, F1 of point nine seven nine and point nine five nine, while</a:t>
+            </a:r>
+          </a:p>
+          <a:p>
+            <a:r>
+              <a:t>viral pneumonia reaches only point six four one."</a:t>
+            </a:r>
+          </a:p>
+          <a:p/>
+          <a:p>
+            <a:r>
+              <a:t>"So recast as abnormality screening it gives ninety five point eight five per</a:t>
+            </a:r>
+          </a:p>
+          <a:p>
+            <a:r>
+              <a:t>cent sensitivity and ninety eight point nine eight per cent specificity. The</a:t>
+            </a:r>
+          </a:p>
+          <a:p>
+            <a:r>
+              <a:t>task it is good at is screening. The task it is weakest at is exactly the one</a:t>
+            </a:r>
+          </a:p>
+          <a:p>
+            <a:r>
+              <a:t>that carries the antibiotic decision, and that has to be said plainly."</a:t>
+            </a:r>
+          </a:p>
+          <a:p/>
+          <a:p>
+            <a:r>
+              <a:t>Delivery:</a:t>
+            </a:r>
+          </a:p>
+          <a:p>
+            <a:r>
+              <a:t>- Owning the EfficientNetV2S fault yourself is worth more than defending it.</a:t>
+            </a:r>
+          </a:p>
+          <a:p>
+            <a:r>
+              <a:t>- NFR1 asked for at least eighty five per cent and is met by zero point three</a:t>
+            </a:r>
+          </a:p>
+          <a:p>
+            <a:r>
+              <a:t>  one of a point. If they push, agree it is narrow.</a:t>
+            </a:r>
+          </a:p>
+        </p:txBody>
+      </p:sp>
+      <p:sp>
+        <p:nvSpPr>
+          <p:cNvPr id="4" name="Slide Number Placeholder 3"/>
+          <p:cNvSpPr>
+            <a:spLocks noGrp="1"/>
+          </p:cNvSpPr>
+          <p:nvPr>
+            <p:ph type="sldNum" idx="5" sz="quarter"/>
+          </p:nvPr>
+        </p:nvSpPr>
+        <p:spPr/>
+      </p:sp>
+    </p:spTree>
+  </p:cSld>
+  <p:clrMapOvr>
+    <a:masterClrMapping/>
+  </p:clrMapOvr>
+</p:notes>
+</file>
+
+<file path=ppt/notesSlides/notesSlide11.xml><?xml version="1.0" encoding="utf-8"?>
+<p:notes xmlns:a="http://schemas.openxmlformats.org/drawingml/2006/main" xmlns:p="http://schemas.openxmlformats.org/presentationml/2006/main" xmlns:r="http://schemas.openxmlformats.org/officeDocument/2006/relationships">
+  <p:cSld>
+    <p:spTree>
+      <p:nvGrpSpPr>
+        <p:cNvPr id="1" name=""/>
+        <p:cNvGrpSpPr/>
+        <p:nvPr/>
+      </p:nvGrpSpPr>
+      <p:grpSpPr>
+        <a:xfrm>
+          <a:off x="0" y="0"/>
+          <a:ext cx="0" cy="0"/>
+          <a:chOff x="0" y="0"/>
+          <a:chExt cx="0" cy="0"/>
+        </a:xfrm>
+      </p:grpSpPr>
+      <p:sp>
+        <p:nvSpPr>
+          <p:cNvPr id="2" name="Slide Image Placeholder 1"/>
+          <p:cNvSpPr>
+            <a:spLocks noGrp="1"/>
+          </p:cNvSpPr>
+          <p:nvPr>
+            <p:ph type="sldImg" idx="2"/>
+          </p:nvPr>
+        </p:nvSpPr>
+        <p:spPr/>
+      </p:sp>
+      <p:sp>
+        <p:nvSpPr>
+          <p:cNvPr id="3" name="Notes Placeholder 2"/>
+          <p:cNvSpPr>
+            <a:spLocks noGrp="1"/>
+          </p:cNvSpPr>
+          <p:nvPr>
+            <p:ph type="body" idx="3" sz="quarter"/>
+          </p:nvPr>
+        </p:nvSpPr>
+        <p:spPr/>
+        <p:txBody>
+          <a:bodyPr/>
+          <a:lstStyle/>
+          <a:p>
+            <a:r>
+              <a:t>[16:45 - 19:00]  RESULTS, INPUT VALIDITY    (thesis: 5.2)</a:t>
+            </a:r>
+          </a:p>
+          <a:p/>
+          <a:p>
+            <a:r>
+              <a:t>Say:</a:t>
+            </a:r>
+          </a:p>
+          <a:p>
+            <a:r>
+              <a:t>"This is the result I care most about. Three numbers."</a:t>
+            </a:r>
+          </a:p>
+          <a:p/>
+          <a:p>
+            <a:r>
+              <a:t>"Ninety two point five per cent of genuine held out scans are retained, against</a:t>
+            </a:r>
+          </a:p>
+          <a:p>
+            <a:r>
+              <a:t>a design floor of ninety. One hundred per cent of the far probe is flagged, all</a:t>
+            </a:r>
+          </a:p>
+          <a:p>
+            <a:r>
+              <a:t>sixty generated images, against a floor of ninety five. So both operating</a:t>
+            </a:r>
+          </a:p>
+          <a:p>
+            <a:r>
+              <a:t>criteria are met."</a:t>
+            </a:r>
+          </a:p>
+          <a:p/>
+          <a:p>
+            <a:r>
+              <a:t>"And the third number is the interesting one. Mahalanobis separates the two</a:t>
+            </a:r>
+          </a:p>
+          <a:p>
+            <a:r>
+              <a:t>populations perfectly, AUROC of one point zero zero zero. Energy, computed from</a:t>
+            </a:r>
+          </a:p>
+          <a:p>
+            <a:r>
+              <a:t>the logits of the very same forward pass, reaches zero point five three nine.</a:t>
+            </a:r>
+          </a:p>
+          <a:p>
+            <a:r>
+              <a:t>That is essentially a coin flip."</a:t>
+            </a:r>
+          </a:p>
+          <a:p/>
+          <a:p>
+            <a:r>
+              <a:t>Explain why, this is the insight:</a:t>
+            </a:r>
+          </a:p>
+          <a:p>
+            <a:r>
+              <a:t>"Energy is a function of the logits. If a model produces large logits for</a:t>
+            </a:r>
+          </a:p>
+          <a:p>
+            <a:r>
+              <a:t>inputs it has never seen, and that is precisely the documented overconfidence,</a:t>
+            </a:r>
+          </a:p>
+          <a:p>
+            <a:r>
+              <a:t>then energy has nothing to work with. Mahalanobis operates before that</a:t>
+            </a:r>
+          </a:p>
+          <a:p>
+            <a:r>
+              <a:t>collapse, in the feature space, where the input still looks unfamiliar."</a:t>
+            </a:r>
+          </a:p>
+          <a:p/>
+          <a:p>
+            <a:r>
+              <a:t>"The practical lesson is that which signal works has to be measured on your own</a:t>
+            </a:r>
+          </a:p>
+          <a:p>
+            <a:r>
+              <a:t>model, not adopted from a paper. If I had taken energy on authority, I would</a:t>
+            </a:r>
+          </a:p>
+          <a:p>
+            <a:r>
+              <a:t>have shipped a safeguard that does not work. That is DR5 in the literature</a:t>
+            </a:r>
+          </a:p>
+          <a:p>
+            <a:r>
+              <a:t>table, and it is why I compared three signals instead of adopting one."</a:t>
+            </a:r>
+          </a:p>
+          <a:p/>
+          <a:p>
+            <a:r>
+              <a:t>Now state the limitation before they do:</a:t>
+            </a:r>
+          </a:p>
+          <a:p>
+            <a:r>
+              <a:t>"I want to be explicit about what that AUROC of one point zero zero zero is</a:t>
+            </a:r>
+          </a:p>
+          <a:p>
+            <a:r>
+              <a:t>against. Sixty generated images: uniform noise, smooth gradients and solid</a:t>
+            </a:r>
+          </a:p>
+          <a:p>
+            <a:r>
+              <a:t>colour blocks, from a fixed seed. That is a far regime sanity check. It is not</a:t>
+            </a:r>
+          </a:p>
+          <a:p>
+            <a:r>
+              <a:t>validation against real photographs, and it is not the near regime, a genuine</a:t>
+            </a:r>
+          </a:p>
+          <a:p>
+            <a:r>
+              <a:t>chest X-ray of a condition the model was never trained on. That case is</a:t>
+            </a:r>
+          </a:p>
+          <a:p>
+            <a:r>
+              <a:t>completely untested, and it is the first item in my future work."</a:t>
+            </a:r>
+          </a:p>
+          <a:p/>
+          <a:p>
+            <a:r>
+              <a:t>Delivery:</a:t>
+            </a:r>
+          </a:p>
+          <a:p>
+            <a:r>
+              <a:t>- Say the limitation in your own voice before the panel asks. If they have to</a:t>
+            </a:r>
+          </a:p>
+          <a:p>
+            <a:r>
+              <a:t>  drag it out of you it reads as a weakness; if you volunteer it, it reads as</a:t>
+            </a:r>
+          </a:p>
+          <a:p>
+            <a:r>
+              <a:t>  judgement.</a:t>
+            </a:r>
+          </a:p>
+        </p:txBody>
+      </p:sp>
+      <p:sp>
+        <p:nvSpPr>
+          <p:cNvPr id="4" name="Slide Number Placeholder 3"/>
+          <p:cNvSpPr>
+            <a:spLocks noGrp="1"/>
+          </p:cNvSpPr>
+          <p:nvPr>
+            <p:ph type="sldNum" idx="5" sz="quarter"/>
+          </p:nvPr>
+        </p:nvSpPr>
+        <p:spPr/>
+      </p:sp>
+    </p:spTree>
+  </p:cSld>
+  <p:clrMapOvr>
+    <a:masterClrMapping/>
+  </p:clrMapOvr>
+</p:notes>
+</file>
+
+<file path=ppt/notesSlides/notesSlide12.xml><?xml version="1.0" encoding="utf-8"?>
+<p:notes xmlns:a="http://schemas.openxmlformats.org/drawingml/2006/main" xmlns:p="http://schemas.openxmlformats.org/presentationml/2006/main" xmlns:r="http://schemas.openxmlformats.org/officeDocument/2006/relationships">
+  <p:cSld>
+    <p:spTree>
+      <p:nvGrpSpPr>
+        <p:cNvPr id="1" name=""/>
+        <p:cNvGrpSpPr/>
+        <p:nvPr/>
+      </p:nvGrpSpPr>
+      <p:grpSpPr>
+        <a:xfrm>
+          <a:off x="0" y="0"/>
+          <a:ext cx="0" cy="0"/>
+          <a:chOff x="0" y="0"/>
+          <a:chExt cx="0" cy="0"/>
+        </a:xfrm>
+      </p:grpSpPr>
+      <p:sp>
+        <p:nvSpPr>
+          <p:cNvPr id="2" name="Slide Image Placeholder 1"/>
+          <p:cNvSpPr>
+            <a:spLocks noGrp="1"/>
+          </p:cNvSpPr>
+          <p:nvPr>
+            <p:ph type="sldImg" idx="2"/>
+          </p:nvPr>
+        </p:nvSpPr>
+        <p:spPr/>
+      </p:sp>
+      <p:sp>
+        <p:nvSpPr>
+          <p:cNvPr id="3" name="Notes Placeholder 2"/>
+          <p:cNvSpPr>
+            <a:spLocks noGrp="1"/>
+          </p:cNvSpPr>
+          <p:nvPr>
+            <p:ph type="body" idx="3" sz="quarter"/>
+          </p:nvPr>
+        </p:nvSpPr>
+        <p:spPr/>
+        <p:txBody>
+          <a:bodyPr/>
+          <a:lstStyle/>
+          <a:p>
+            <a:r>
+              <a:t>[19:00 - 20:30]  CONCLUSION    (thesis: 6 DISCUSSION AND CONCLUSIONS)</a:t>
+            </a:r>
+          </a:p>
+          <a:p/>
+          <a:p>
+            <a:r>
+              <a:t>Say:</a:t>
+            </a:r>
+          </a:p>
+          <a:p>
+            <a:r>
               <a:t>"To close. This thesis addressed the gap between a chest X-ray classifier that</a:t>
             </a:r>
           </a:p>
@@ -799,12 +1254,12 @@
           </a:p>
           <a:p>
             <a:r>
-              <a:t>- Finish on the bounded claim, not on the accuracy number. That is the</a:t>
-            </a:r>
-          </a:p>
-          <a:p>
-            <a:r>
-              <a:t>  sentence that shows you understand what your own work does and does not mean.</a:t>
+              <a:t>- Finish on the bounded claim, not on the accuracy number. That is the sentence</a:t>
+            </a:r>
+          </a:p>
+          <a:p>
+            <a:r>
+              <a:t>  that shows you understand what your own work does and does not mean.</a:t>
             </a:r>
           </a:p>
           <a:p>
@@ -879,7 +1334,7 @@
           <a:lstStyle/>
           <a:p>
             <a:r>
-              <a:t>[00:30 - 02:30]  THE PROBLEM</a:t>
+              <a:t>[00:30 - 02:30]  THE PROBLEM      (thesis: 1 INTRODUCTION, 1.2)</a:t>
             </a:r>
           </a:p>
           <a:p/>
@@ -1069,7 +1524,7 @@
           <a:lstStyle/>
           <a:p>
             <a:r>
-              <a:t>[02:30 - 04:00]  RESEARCH QUESTION</a:t>
+              <a:t>[02:30 - 03:45]  RESEARCH QUESTION    (thesis: 1.3)</a:t>
             </a:r>
           </a:p>
           <a:p/>
@@ -1143,37 +1598,6 @@
           <a:p/>
           <a:p>
             <a:r>
-              <a:t>If asked about the objectives, they are five:</a:t>
-            </a:r>
-          </a:p>
-          <a:p>
-            <a:r>
-              <a:t>"RO1 review and derive requirements, RO2 compare three architectures, RO3 build</a:t>
-            </a:r>
-          </a:p>
-          <a:p>
-            <a:r>
-              <a:t>the safeguard and integrate it end to end, RO4 evaluate the safeguard and the</a:t>
-            </a:r>
-          </a:p>
-          <a:p>
-            <a:r>
-              <a:t>explanation, RO5 recommend where this is and is not suitable. Section 6.2 of</a:t>
-            </a:r>
-          </a:p>
-          <a:p>
-            <a:r>
-              <a:t>the thesis assesses each one against the evidence rather than against</a:t>
-            </a:r>
-          </a:p>
-          <a:p>
-            <a:r>
-              <a:t>intention."</a:t>
-            </a:r>
-          </a:p>
-          <a:p/>
-          <a:p>
-            <a:r>
               <a:t>Delivery:</a:t>
             </a:r>
           </a:p>
@@ -1185,6 +1609,16 @@
           <a:p>
             <a:r>
               <a:t>  hangs on.</a:t>
+            </a:r>
+          </a:p>
+          <a:p>
+            <a:r>
+              <a:t>- The next slide turns these three questions into the five objectives, so end</a:t>
+            </a:r>
+          </a:p>
+          <a:p>
+            <a:r>
+              <a:t>  with "and those become five objectives".</a:t>
             </a:r>
           </a:p>
         </p:txBody>
@@ -1254,7 +1688,7 @@
           <a:lstStyle/>
           <a:p>
             <a:r>
-              <a:t>[04:00 - 05:30]  METHODOLOGY</a:t>
+              <a:t>[03:45 - 05:00]  AIM AND OBJECTIVES   (thesis: 2 OBJECTIVES)</a:t>
             </a:r>
           </a:p>
           <a:p/>
@@ -1265,137 +1699,100 @@
           </a:p>
           <a:p>
             <a:r>
-              <a:t>"Briefly, how the research was conducted."</a:t>
+              <a:t>"The aim is to design, implement and evaluate an explainable four class</a:t>
+            </a:r>
+          </a:p>
+          <a:p>
+            <a:r>
+              <a:t>framework that is aware of out of distribution inputs, deliver it as a working</a:t>
+            </a:r>
+          </a:p>
+          <a:p>
+            <a:r>
+              <a:t>decision support platform, and produce evidence about three things: its</a:t>
+            </a:r>
+          </a:p>
+          <a:p>
+            <a:r>
+              <a:t>performance, its input validity behaviour, and where its explanations place</a:t>
+            </a:r>
+          </a:p>
+          <a:p>
+            <a:r>
+              <a:t>their attention."</a:t>
             </a:r>
           </a:p>
           <a:p/>
           <a:p>
             <a:r>
-              <a:t>"The paradigm is post positivist. Accuracy, recall, AUROC and in lung attention</a:t>
-            </a:r>
-          </a:p>
-          <a:p>
-            <a:r>
-              <a:t>are objective quantities, but they can only be estimated, never known exactly,</a:t>
-            </a:r>
-          </a:p>
-          <a:p>
-            <a:r>
-              <a:t>because of sampling error, label noise and the randomness of a single training</a:t>
-            </a:r>
-          </a:p>
-          <a:p>
-            <a:r>
-              <a:t>run. That position has consequences I held myself to: every measurement is</a:t>
-            </a:r>
-          </a:p>
-          <a:p>
-            <a:r>
-              <a:t>reported with its sample size, a difference smaller than the resolution of the</a:t>
-            </a:r>
-          </a:p>
-          <a:p>
-            <a:r>
-              <a:t>design is declared inconclusive, and a disconfirming result is reported in the</a:t>
-            </a:r>
-          </a:p>
-          <a:p>
-            <a:r>
-              <a:t>same terms as a confirming one. You will see me do all three later in this</a:t>
-            </a:r>
-          </a:p>
-          <a:p>
-            <a:r>
-              <a:t>talk."</a:t>
+              <a:t>"Five objectives follow. RO1, identify the limitations of existing systems</a:t>
+            </a:r>
+          </a:p>
+          <a:p>
+            <a:r>
+              <a:t>through a critical review and derive design requirements from them. RO2,</a:t>
+            </a:r>
+          </a:p>
+          <a:p>
+            <a:r>
+              <a:t>analyse three architectures under one dataset, one split and one protocol, with</a:t>
+            </a:r>
+          </a:p>
+          <a:p>
+            <a:r>
+              <a:t>per class metrics. RO3, design and develop the post hoc safeguard without</a:t>
+            </a:r>
+          </a:p>
+          <a:p>
+            <a:r>
+              <a:t>retraining and integrate it end to end. RO4, evaluate the safeguard and the</a:t>
+            </a:r>
+          </a:p>
+          <a:p>
+            <a:r>
+              <a:t>explanation. RO5, recommend where this is, and is not, suitable."</a:t>
             </a:r>
           </a:p>
           <a:p/>
           <a:p>
             <a:r>
-              <a:t>"The approach is predominantly deductive. The closed world property of softmax</a:t>
-            </a:r>
-          </a:p>
-          <a:p>
-            <a:r>
-              <a:t>and the feature space method of Lee and colleagues give a testable expectation,</a:t>
-            </a:r>
-          </a:p>
-          <a:p>
-            <a:r>
-              <a:t>that a Mahalanobis signal should separate invalid inputs on this model. I</a:t>
-            </a:r>
-          </a:p>
-          <a:p>
-            <a:r>
-              <a:t>operationalised that into thresholds and measured it. There is one inductive</a:t>
-            </a:r>
-          </a:p>
-          <a:p>
-            <a:r>
-              <a:t>element, the failure of the energy signal, which came out of the measurements</a:t>
-            </a:r>
-          </a:p>
-          <a:p>
-            <a:r>
-              <a:t>rather than being predicted, and I keep the two clearly separate."</a:t>
+              <a:t>Then the line that matters:</a:t>
+            </a:r>
+          </a:p>
+          <a:p>
+            <a:r>
+              <a:t>"Section 6.2 of the thesis assesses each of those five against the evidence</a:t>
+            </a:r>
+          </a:p>
+          <a:p>
+            <a:r>
+              <a:t>rather than against intention, and RO4 is reported as only partly achieved,</a:t>
+            </a:r>
+          </a:p>
+          <a:p>
+            <a:r>
+              <a:t>because detection was demonstrated for the far regime only."</a:t>
             </a:r>
           </a:p>
           <a:p/>
           <a:p>
             <a:r>
-              <a:t>"The strategy is design science. The question asks to what extent a safeguard</a:t>
-            </a:r>
-          </a:p>
-          <a:p>
-            <a:r>
-              <a:t>can improve safety, and that quantity simply does not exist until the safeguard</a:t>
-            </a:r>
-          </a:p>
-          <a:p>
-            <a:r>
-              <a:t>has been built. So the artefact is built, and then evaluated experimentally."</a:t>
-            </a:r>
-          </a:p>
-          <a:p/>
-          <a:p>
-            <a:r>
-              <a:t>Now the point that protects every number that follows:</a:t>
-            </a:r>
-          </a:p>
-          <a:p>
-            <a:r>
-              <a:t>"The freeze point matters. Calibration follows model selection and uses only</a:t>
-            </a:r>
-          </a:p>
-          <a:p>
-            <a:r>
-              <a:t>training and validation data. Evaluation follows the freeze. So no result I</a:t>
-            </a:r>
-          </a:p>
-          <a:p>
-            <a:r>
-              <a:t>report later was used to adjust the artefact that produced it. The test</a:t>
-            </a:r>
-          </a:p>
-          <a:p>
-            <a:r>
-              <a:t>partition was never touched until the artefact was final."</a:t>
-            </a:r>
-          </a:p>
-          <a:p/>
-          <a:p>
-            <a:r>
               <a:t>Delivery:</a:t>
             </a:r>
           </a:p>
           <a:p>
             <a:r>
-              <a:t>- The freeze point is the answer to "did you tune on your test set?". Say it</a:t>
-            </a:r>
-          </a:p>
-          <a:p>
-            <a:r>
-              <a:t>  before they ask.</a:t>
+              <a:t>- Do not read all five word for word, the panel can read. Say RO1 to RO5 in one</a:t>
+            </a:r>
+          </a:p>
+          <a:p>
+            <a:r>
+              <a:t>  breath each, then spend your time on the last line.</a:t>
+            </a:r>
+          </a:p>
+          <a:p>
+            <a:r>
+              <a:t>- Volunteering that RO4 is only partly achieved is stronger than being asked.</a:t>
             </a:r>
           </a:p>
         </p:txBody>
@@ -1465,7 +1862,7 @@
           <a:lstStyle/>
           <a:p>
             <a:r>
-              <a:t>[05:30 - 07:30]  THE DATA</a:t>
+              <a:t>[05:00 - 06:45]  THE LITERATURE GAP   (thesis: 3 LITERATURE REVIEW)</a:t>
             </a:r>
           </a:p>
           <a:p/>
@@ -1476,139 +1873,106 @@
           </a:p>
           <a:p>
             <a:r>
-              <a:t>"Nine thousand two hundred and nine chest radiographs from curated public</a:t>
-            </a:r>
-          </a:p>
-          <a:p>
-            <a:r>
-              <a:t>research collections, four classes: Normal, COVID-19, bacterial pneumonia and</a:t>
-            </a:r>
-          </a:p>
-          <a:p>
-            <a:r>
-              <a:t>viral pneumonia."</a:t>
+              <a:t>"This table is the argument of my literature review in one picture. Seven rows,</a:t>
+            </a:r>
+          </a:p>
+          <a:p>
+            <a:r>
+              <a:t>the six most cited chest X-ray systems and then mine."</a:t>
             </a:r>
           </a:p>
           <a:p/>
           <a:p>
             <a:r>
-              <a:t>"Split seventy, fifteen, fifteen, stratified, so six thousand four hundred and</a:t>
-            </a:r>
-          </a:p>
-          <a:p>
-            <a:r>
-              <a:t>forty six train, one thousand three hundred and eighty one validation, one</a:t>
-            </a:r>
-          </a:p>
-          <a:p>
-            <a:r>
-              <a:t>thousand three hundred and eighty two test."</a:t>
+              <a:t>"Read the fourth column. Rajpurkar, Apostolopoulos, Ozturk, Narin, Chowdhury,</a:t>
+            </a:r>
+          </a:p>
+          <a:p>
+            <a:r>
+              <a:t>Huang and Liao. Input validity check: none reported. Not one of them. Every</a:t>
+            </a:r>
+          </a:p>
+          <a:p>
+            <a:r>
+              <a:t>system in the literature will give you a confident diagnosis for a photograph</a:t>
+            </a:r>
+          </a:p>
+          <a:p>
+            <a:r>
+              <a:t>of a cat, and none of them measures whether its explanation lands on the lungs."</a:t>
             </a:r>
           </a:p>
           <a:p/>
           <a:p>
             <a:r>
-              <a:t>"Two design points matter here."</a:t>
+              <a:t>"The third column is almost as telling. Where explanation exists at all it is</a:t>
+            </a:r>
+          </a:p>
+          <a:p>
+            <a:r>
+              <a:t>qualitative, a heatmap shown as a picture with no measurement attached. So no</a:t>
+            </a:r>
+          </a:p>
+          <a:p>
+            <a:r>
+              <a:t>reviewed system can distinguish a model reasoning from pathology from one</a:t>
+            </a:r>
+          </a:p>
+          <a:p>
+            <a:r>
+              <a:t>exploiting an artefact."</a:t>
             </a:r>
           </a:p>
           <a:p/>
           <a:p>
             <a:r>
-              <a:t>"First, the audit comes before the split. I removed duplicates, corrupted files</a:t>
-            </a:r>
-          </a:p>
-          <a:p>
-            <a:r>
-              <a:t>and low resolution files first, because a duplicate that lands on both sides of</a:t>
-            </a:r>
-          </a:p>
-          <a:p>
-            <a:r>
-              <a:t>a partition boundary is a direct route to leakage, and any accuracy after that</a:t>
-            </a:r>
-          </a:p>
-          <a:p>
-            <a:r>
-              <a:t>is fiction."</a:t>
+              <a:t>"That gap gives me nine derived requirements, and three of them separate this</a:t>
+            </a:r>
+          </a:p>
+          <a:p>
+            <a:r>
+              <a:t>design from every row above. DR4, the system must be able to refuse to answer.</a:t>
+            </a:r>
+          </a:p>
+          <a:p>
+            <a:r>
+              <a:t>DR5, several validity signals compared rather than one adopted on authority.</a:t>
+            </a:r>
+          </a:p>
+          <a:p>
+            <a:r>
+              <a:t>DR8, explanation localisation measured and disclosed, not just drawn."</a:t>
             </a:r>
           </a:p>
           <a:p/>
           <a:p>
             <a:r>
-              <a:t>"Second, one split file is reused by all three architectures and by the</a:t>
-            </a:r>
-          </a:p>
-          <a:p>
-            <a:r>
-              <a:t>calibration of the safeguard. That is what makes the three models comparable to</a:t>
-            </a:r>
-          </a:p>
-          <a:p>
-            <a:r>
-              <a:t>each other, and it is why a difference between them is about the architecture</a:t>
-            </a:r>
-          </a:p>
-          <a:p>
-            <a:r>
-              <a:t>and not about the data they happened to get."</a:t>
-            </a:r>
-          </a:p>
-          <a:p/>
-          <a:p>
-            <a:r>
-              <a:t>"The classes are imbalanced, COVID-19 has one thousand two hundred and eighty</a:t>
-            </a:r>
-          </a:p>
-          <a:p>
-            <a:r>
-              <a:t>one images against three thousand two hundred and seventy one Normal. That is</a:t>
-            </a:r>
-          </a:p>
-          <a:p>
-            <a:r>
-              <a:t>handled with stratified sampling and a class weighted loss."</a:t>
-            </a:r>
-          </a:p>
-          <a:p/>
-          <a:p>
-            <a:r>
-              <a:t>"On ethics: this is secondary data, public research collections, no patient</a:t>
-            </a:r>
-          </a:p>
-          <a:p>
-            <a:r>
-              <a:t>identifiers, no human participants, so institutional ethics approval was not</a:t>
-            </a:r>
-          </a:p>
-          <a:p>
-            <a:r>
-              <a:t>applicable."</a:t>
-            </a:r>
-          </a:p>
-          <a:p/>
-          <a:p>
-            <a:r>
               <a:t>Delivery:</a:t>
             </a:r>
           </a:p>
           <a:p>
             <a:r>
-              <a:t>- Say the leakage point clearly. It is the question a good panel asks first.</a:t>
-            </a:r>
-          </a:p>
-          <a:p>
-            <a:r>
-              <a:t>- Weakness to own before they raise it: the split is file level, not patient</a:t>
-            </a:r>
-          </a:p>
-          <a:p>
-            <a:r>
-              <a:t>  level. If the collections contain several images of the same patient, some</a:t>
-            </a:r>
-          </a:p>
-          <a:p>
-            <a:r>
-              <a:t>  could span the split. Say so. Do not wait to be caught.</a:t>
+              <a:t>- Point at the "None reported" column and pause. That column is your</a:t>
+            </a:r>
+          </a:p>
+          <a:p>
+            <a:r>
+              <a:t>  justification for the whole project.</a:t>
+            </a:r>
+          </a:p>
+          <a:p>
+            <a:r>
+              <a:t>- If asked whether the comparison is fair: the class formulations differ</a:t>
+            </a:r>
+          </a:p>
+          <a:p>
+            <a:r>
+              <a:t>  between these studies, so the accuracy numbers are not comparable, which is</a:t>
+            </a:r>
+          </a:p>
+          <a:p>
+            <a:r>
+              <a:t>  exactly why the table compares capabilities rather than scores.</a:t>
             </a:r>
           </a:p>
         </p:txBody>
@@ -1678,7 +2042,7 @@
           <a:lstStyle/>
           <a:p>
             <a:r>
-              <a:t>[07:30 - 10:00]  CONTRIBUTION 1, THE SAFEGUARD</a:t>
+              <a:t>[06:45 - 08:15]  METHODOLOGY      (thesis: 4.1, 4.2, 4.3)</a:t>
             </a:r>
           </a:p>
           <a:p/>
@@ -1689,189 +2053,127 @@
           </a:p>
           <a:p>
             <a:r>
-              <a:t>"This is the first contribution. The model is unchanged. Nothing is retrained.</a:t>
-            </a:r>
-          </a:p>
-          <a:p>
-            <a:r>
-              <a:t>Everything here comes out of the forward pass that was happening anyway."</a:t>
+              <a:t>"Briefly, how the research was conducted."</a:t>
             </a:r>
           </a:p>
           <a:p/>
           <a:p>
             <a:r>
-              <a:t>Explain the one pass, three outputs idea:</a:t>
-            </a:r>
-          </a:p>
-          <a:p>
-            <a:r>
-              <a:t>"I take the last dense layer, read its weights and bias, and build a small</a:t>
-            </a:r>
-          </a:p>
-          <a:p>
-            <a:r>
-              <a:t>auxiliary model that gives me the penultimate feature vector. From that vector</a:t>
-            </a:r>
-          </a:p>
-          <a:p>
-            <a:r>
-              <a:t>I recover the logits with the same affine map the model itself would apply, and</a:t>
-            </a:r>
-          </a:p>
-          <a:p>
-            <a:r>
-              <a:t>the probabilities follow from their softmax. So one evaluation gives me the</a:t>
-            </a:r>
-          </a:p>
-          <a:p>
-            <a:r>
-              <a:t>features the detector needs, the logits the energy score needs, and the</a:t>
-            </a:r>
-          </a:p>
-          <a:p>
-            <a:r>
-              <a:t>probabilities the user sees, and all three describe the same forward pass. That</a:t>
-            </a:r>
-          </a:p>
-          <a:p>
-            <a:r>
-              <a:t>correspondence is the point, not the saved computation."</a:t>
+              <a:t>"The paradigm is post positivist. Accuracy, recall, AUROC and in lung attention</a:t>
+            </a:r>
+          </a:p>
+          <a:p>
+            <a:r>
+              <a:t>are objective quantities, but they can only be estimated, never known exactly,</a:t>
+            </a:r>
+          </a:p>
+          <a:p>
+            <a:r>
+              <a:t>because of sampling error, label noise and the randomness of a single training</a:t>
+            </a:r>
+          </a:p>
+          <a:p>
+            <a:r>
+              <a:t>run. That position has consequences I held myself to: every measurement is</a:t>
+            </a:r>
+          </a:p>
+          <a:p>
+            <a:r>
+              <a:t>reported with its sample size, a difference smaller than the resolution of the</a:t>
+            </a:r>
+          </a:p>
+          <a:p>
+            <a:r>
+              <a:t>design is declared inconclusive, and a disconfirming result is reported in the</a:t>
+            </a:r>
+          </a:p>
+          <a:p>
+            <a:r>
+              <a:t>same terms as a confirming one. You will see me do all three later."</a:t>
             </a:r>
           </a:p>
           <a:p/>
           <a:p>
             <a:r>
-              <a:t>"On those features I fit one Gaussian per class, with a single shared</a:t>
-            </a:r>
-          </a:p>
-          <a:p>
-            <a:r>
-              <a:t>covariance matrix, and score an input by its distance to the nearest class</a:t>
-            </a:r>
-          </a:p>
-          <a:p>
-            <a:r>
-              <a:t>mean. That is the Mahalanobis signal, from Lee and colleagues, 2018."</a:t>
+              <a:t>"The approach is predominantly deductive. The closed world property of softmax</a:t>
+            </a:r>
+          </a:p>
+          <a:p>
+            <a:r>
+              <a:t>and the feature space method of Lee and colleagues give a testable expectation,</a:t>
+            </a:r>
+          </a:p>
+          <a:p>
+            <a:r>
+              <a:t>that a Mahalanobis signal should separate invalid inputs on this model. I</a:t>
+            </a:r>
+          </a:p>
+          <a:p>
+            <a:r>
+              <a:t>operationalised that into thresholds and measured it. The one inductive</a:t>
+            </a:r>
+          </a:p>
+          <a:p>
+            <a:r>
+              <a:t>element, the failure of the energy signal, came out of the measurements rather</a:t>
+            </a:r>
+          </a:p>
+          <a:p>
+            <a:r>
+              <a:t>than being predicted, and I keep the two clearly separate."</a:t>
             </a:r>
           </a:p>
           <a:p/>
           <a:p>
             <a:r>
-              <a:t>"I also compute two output space signals, energy and maximum softmax</a:t>
-            </a:r>
-          </a:p>
-          <a:p>
-            <a:r>
-              <a:t>probability, and report both. The deployed policy uses Mahalanobis alone, and</a:t>
-            </a:r>
-          </a:p>
-          <a:p>
-            <a:r>
-              <a:t>slide 9 shows the measurement that made me choose it."</a:t>
+              <a:t>"The strategy is design science. The question asks to what extent a safeguard</a:t>
+            </a:r>
+          </a:p>
+          <a:p>
+            <a:r>
+              <a:t>can improve safety, and that quantity does not exist until the safeguard has</a:t>
+            </a:r>
+          </a:p>
+          <a:p>
+            <a:r>
+              <a:t>been built."</a:t>
             </a:r>
           </a:p>
           <a:p/>
           <a:p>
             <a:r>
-              <a:t>"Calibration runs once per model, on one thousand two hundred training images,</a:t>
-            </a:r>
-          </a:p>
-          <a:p>
-            <a:r>
-              <a:t>thresholded on six hundred validation images, at ninety five per cent retention</a:t>
-            </a:r>
-          </a:p>
-          <a:p>
-            <a:r>
-              <a:t>of genuine scans. The covariance is tied across classes because twelve hundred</a:t>
-            </a:r>
-          </a:p>
-          <a:p>
-            <a:r>
-              <a:t>images is only about four and a half times the two hundred and fifty six</a:t>
-            </a:r>
-          </a:p>
-          <a:p>
-            <a:r>
-              <a:t>dimensions, so four separate matrices would be rank deficient."</a:t>
+              <a:t>Now the point that protects every number that follows:</a:t>
+            </a:r>
+          </a:p>
+          <a:p>
+            <a:r>
+              <a:t>"The freeze point matters. Calibration follows model selection and uses only</a:t>
+            </a:r>
+          </a:p>
+          <a:p>
+            <a:r>
+              <a:t>training and validation data. Evaluation follows the freeze. So no result I</a:t>
+            </a:r>
+          </a:p>
+          <a:p>
+            <a:r>
+              <a:t>report later was used to adjust the artefact that produced it."</a:t>
             </a:r>
           </a:p>
           <a:p/>
           <a:p>
             <a:r>
-              <a:t>"One detail I want to highlight. The safeguard never sees a single invalid</a:t>
-            </a:r>
-          </a:p>
-          <a:p>
-            <a:r>
-              <a:t>example during calibration. The operating point is set entirely from real</a:t>
-            </a:r>
-          </a:p>
-          <a:p>
-            <a:r>
-              <a:t>radiographs. It learns what normal looks like, not what abnormal looks like."</a:t>
-            </a:r>
-          </a:p>
-          <a:p/>
-          <a:p>
-            <a:r>
-              <a:t>On the delivered system, since there is no separate platform slide:</a:t>
-            </a:r>
-          </a:p>
-          <a:p>
-            <a:r>
-              <a:t>"This is live in the platform, not a notebook. Next.js front end, PHP REST API,</a:t>
-            </a:r>
-          </a:p>
-          <a:p>
-            <a:r>
-              <a:t>a separate Python inference service and MySQL, with four user roles. When the</a:t>
-            </a:r>
-          </a:p>
-          <a:p>
-            <a:r>
-              <a:t>verdict fires the response carries no diagnosis at all: no predicted class, no</a:t>
-            </a:r>
-          </a:p>
-          <a:p>
-            <a:r>
-              <a:t>confidence, no probability bars, just a banner naming the signal that fired.</a:t>
-            </a:r>
-          </a:p>
-          <a:p>
-            <a:r>
-              <a:t>And it survives the round trip, so reopening the case from history still shows</a:t>
-            </a:r>
-          </a:p>
-          <a:p>
-            <a:r>
-              <a:t>no diagnosis and the exported PDF reproduces the notice in all three languages.</a:t>
-            </a:r>
-          </a:p>
-          <a:p>
-            <a:r>
-              <a:t>I am happy to demonstrate it after the talk."</a:t>
-            </a:r>
-          </a:p>
-          <a:p/>
-          <a:p>
-            <a:r>
               <a:t>Delivery:</a:t>
             </a:r>
           </a:p>
           <a:p>
             <a:r>
-              <a:t>- If they ask why not just threshold the softmax confidence: that is the MSP</a:t>
-            </a:r>
-          </a:p>
-          <a:p>
-            <a:r>
-              <a:t>  baseline, it is computed, and slide 9 shows output space signals failing on</a:t>
-            </a:r>
-          </a:p>
-          <a:p>
-            <a:r>
-              <a:t>  this model. That is the finding.</a:t>
+              <a:t>- The freeze point is the answer to "did you tune on your test set?". Say it</a:t>
+            </a:r>
+          </a:p>
+          <a:p>
+            <a:r>
+              <a:t>  before they ask.</a:t>
             </a:r>
           </a:p>
         </p:txBody>
@@ -1941,7 +2243,7 @@
           <a:lstStyle/>
           <a:p>
             <a:r>
-              <a:t>[10:00 - 12:00]  CONTRIBUTION 2, THE EXPLANATION</a:t>
+              <a:t>[08:15 - 10:00]  THE DATA         (thesis: 4.4)</a:t>
             </a:r>
           </a:p>
           <a:p/>
@@ -1952,163 +2254,139 @@
           </a:p>
           <a:p>
             <a:r>
-              <a:t>"The second contribution is the explanation, and there are two corrections in</a:t>
-            </a:r>
-          </a:p>
-          <a:p>
-            <a:r>
-              <a:t>it."</a:t>
+              <a:t>"Nine thousand two hundred and nine chest radiographs from curated public</a:t>
+            </a:r>
+          </a:p>
+          <a:p>
+            <a:r>
+              <a:t>research collections, four classes: Normal, COVID-19, bacterial pneumonia and</a:t>
+            </a:r>
+          </a:p>
+          <a:p>
+            <a:r>
+              <a:t>viral pneumonia."</a:t>
             </a:r>
           </a:p>
           <a:p/>
           <a:p>
             <a:r>
-              <a:t>"The first is numerical. Grad-CAM is defined on the class score before the</a:t>
-            </a:r>
-          </a:p>
-          <a:p>
-            <a:r>
-              <a:t>softmax. If you differentiate the probability instead, the chain rule brings in</a:t>
-            </a:r>
-          </a:p>
-          <a:p>
-            <a:r>
-              <a:t>a factor that goes to zero exactly when the model is confident. On COVID-19 and</a:t>
-            </a:r>
-          </a:p>
-          <a:p>
-            <a:r>
-              <a:t>Normal this model routinely exceeds point nine seven, so that factor drops</a:t>
-            </a:r>
-          </a:p>
-          <a:p>
-            <a:r>
-              <a:t>below point zero three and the heatmap is numerical noise. I rebuilt the</a:t>
-            </a:r>
-          </a:p>
-          <a:p>
-            <a:r>
-              <a:t>classifier as a linear layer carrying the same weights and differentiate the</a:t>
-            </a:r>
-          </a:p>
-          <a:p>
-            <a:r>
-              <a:t>logit, which removes the factor entirely."</a:t>
+              <a:t>"Split seventy, fifteen, fifteen, stratified, so six thousand four hundred and</a:t>
+            </a:r>
+          </a:p>
+          <a:p>
+            <a:r>
+              <a:t>forty six train, one thousand three hundred and eighty one validation, one</a:t>
+            </a:r>
+          </a:p>
+          <a:p>
+            <a:r>
+              <a:t>thousand three hundred and eighty two test."</a:t>
             </a:r>
           </a:p>
           <a:p/>
           <a:p>
             <a:r>
-              <a:t>"The second is anatomical, and it is the more interesting one. DeGrave and</a:t>
-            </a:r>
-          </a:p>
-          <a:p>
-            <a:r>
-              <a:t>colleagues showed in Nature Machine Intelligence that COVID classifiers often</a:t>
-            </a:r>
-          </a:p>
-          <a:p>
-            <a:r>
-              <a:t>key on shoulders, image borders and burnt in markers instead of lung tissue.</a:t>
-            </a:r>
-          </a:p>
-          <a:p>
-            <a:r>
-              <a:t>Teixeira and colleagues showed that restricting the map to the lung field is</a:t>
-            </a:r>
-          </a:p>
-          <a:p>
-            <a:r>
-              <a:t>the remedy. So I estimate the lung field with classical computer vision, no</a:t>
-            </a:r>
-          </a:p>
-          <a:p>
-            <a:r>
-              <a:t>extra trained weights, and restrict the displayed map to it."</a:t>
+              <a:t>"Two design points matter here."</a:t>
             </a:r>
           </a:p>
           <a:p/>
           <a:p>
             <a:r>
-              <a:t>Now the honest part, and say it deliberately:</a:t>
-            </a:r>
-          </a:p>
-          <a:p>
-            <a:r>
-              <a:t>"But masking only changes what is shown. It does not stop the classifier using</a:t>
-            </a:r>
-          </a:p>
-          <a:p>
-            <a:r>
-              <a:t>pixels outside the lungs. So I measure how much of the attention was inside the</a:t>
-            </a:r>
-          </a:p>
-          <a:p>
-            <a:r>
-              <a:t>lung field before masking, and I report that number with every scan. If it</a:t>
-            </a:r>
-          </a:p>
-          <a:p>
-            <a:r>
-              <a:t>falls below one half, the user gets a caution."</a:t>
+              <a:t>"First, the audit comes before the split. I removed duplicates, corrupted files</a:t>
+            </a:r>
+          </a:p>
+          <a:p>
+            <a:r>
+              <a:t>and low resolution files first, because a duplicate that lands on both sides of</a:t>
+            </a:r>
+          </a:p>
+          <a:p>
+            <a:r>
+              <a:t>a partition boundary is a direct route to leakage, and any accuracy after that</a:t>
+            </a:r>
+          </a:p>
+          <a:p>
+            <a:r>
+              <a:t>is fiction."</a:t>
             </a:r>
           </a:p>
           <a:p/>
           <a:p>
             <a:r>
-              <a:t>"The picture makes the point. On the left, the raw map, with real mass on the</a:t>
-            </a:r>
-          </a:p>
-          <a:p>
-            <a:r>
-              <a:t>image border and outside the chest. On the right, the same map restricted to</a:t>
-            </a:r>
-          </a:p>
-          <a:p>
-            <a:r>
-              <a:t>the lungs. It looks far more convincing, and that is exactly the danger. That</a:t>
-            </a:r>
-          </a:p>
-          <a:p>
-            <a:r>
-              <a:t>is why the number is disclosed rather than quietly dropped."</a:t>
+              <a:t>"Second, one split file is reused by all three architectures and by the</a:t>
+            </a:r>
+          </a:p>
+          <a:p>
+            <a:r>
+              <a:t>calibration of the safeguard. That is what makes the three models comparable to</a:t>
+            </a:r>
+          </a:p>
+          <a:p>
+            <a:r>
+              <a:t>each other, and it is why a difference between them is about the architecture</a:t>
+            </a:r>
+          </a:p>
+          <a:p>
+            <a:r>
+              <a:t>and not about the data they happened to get."</a:t>
             </a:r>
           </a:p>
           <a:p/>
           <a:p>
             <a:r>
-              <a:t>"On RQ3 itself, the finding is qualitative and I report it as such: the lung</a:t>
-            </a:r>
-          </a:p>
-          <a:p>
-            <a:r>
-              <a:t>restricted maps fall on the regions clinically associated with each class,</a:t>
-            </a:r>
-          </a:p>
-          <a:p>
-            <a:r>
-              <a:t>focal consolidation for bacterial cases and more diffuse bilateral activation</a:t>
-            </a:r>
-          </a:p>
-          <a:p>
-            <a:r>
-              <a:t>for viral ones."</a:t>
+              <a:t>"The classes are imbalanced, COVID-19 has one thousand two hundred and eighty</a:t>
+            </a:r>
+          </a:p>
+          <a:p>
+            <a:r>
+              <a:t>one images against three thousand two hundred and seventy one Normal. That is</a:t>
+            </a:r>
+          </a:p>
+          <a:p>
+            <a:r>
+              <a:t>handled with stratified sampling and a class weighted loss."</a:t>
             </a:r>
           </a:p>
           <a:p/>
           <a:p>
             <a:r>
+              <a:t>"On ethics: secondary data, public research collections, no patient</a:t>
+            </a:r>
+          </a:p>
+          <a:p>
+            <a:r>
+              <a:t>identifiers, no human participants, so institutional ethics approval was not</a:t>
+            </a:r>
+          </a:p>
+          <a:p>
+            <a:r>
+              <a:t>applicable."</a:t>
+            </a:r>
+          </a:p>
+          <a:p/>
+          <a:p>
+            <a:r>
               <a:t>Delivery:</a:t>
             </a:r>
           </a:p>
           <a:p>
             <a:r>
-              <a:t>- This is the slide that shows research maturity. You found a fix that makes</a:t>
-            </a:r>
-          </a:p>
-          <a:p>
-            <a:r>
-              <a:t>  your own output look better and you refused to let it stand alone. Say that.</a:t>
+              <a:t>- Say the leakage point clearly. It is the question a good panel asks first.</a:t>
+            </a:r>
+          </a:p>
+          <a:p>
+            <a:r>
+              <a:t>- Weakness to own before they raise it: the split is file level, not patient</a:t>
+            </a:r>
+          </a:p>
+          <a:p>
+            <a:r>
+              <a:t>  level. If the collections contain several images of the same patient, some</a:t>
+            </a:r>
+          </a:p>
+          <a:p>
+            <a:r>
+              <a:t>  could span the split. Say so. Do not wait to be caught.</a:t>
             </a:r>
           </a:p>
         </p:txBody>
@@ -2178,7 +2456,7 @@
           <a:lstStyle/>
           <a:p>
             <a:r>
-              <a:t>[12:00 - 14:30]  RESULTS, CLASSIFICATION</a:t>
+              <a:t>[10:00 - 12:30]  CONTRIBUTION 1, THE SAFEGUARD   (thesis: 4.12.1)</a:t>
             </a:r>
           </a:p>
           <a:p/>
@@ -2189,152 +2467,184 @@
           </a:p>
           <a:p>
             <a:r>
-              <a:t>"DenseNet121 reached eighty five point three one per cent on the held out test</a:t>
-            </a:r>
-          </a:p>
-          <a:p>
-            <a:r>
-              <a:t>set, EfficientNetV2B3 eighty four point three zero, EfficientNetV2S eighty</a:t>
-            </a:r>
-          </a:p>
-          <a:p>
-            <a:r>
-              <a:t>point five four. DenseNet121 is the deployed model."</a:t>
+              <a:t>"This is the first contribution. The model is unchanged. Nothing is retrained.</a:t>
+            </a:r>
+          </a:p>
+          <a:p>
+            <a:r>
+              <a:t>Everything here comes out of the forward pass that was happening anyway."</a:t>
             </a:r>
           </a:p>
           <a:p/>
           <a:p>
             <a:r>
-              <a:t>Now immediately undercut the headline, this is the point of the slide:</a:t>
-            </a:r>
-          </a:p>
-          <a:p>
-            <a:r>
-              <a:t>"I want to be careful about that ranking. The lead over EfficientNetV2B3 is one</a:t>
-            </a:r>
-          </a:p>
-          <a:p>
-            <a:r>
-              <a:t>point zero one percentage points. On one thousand three hundred and eighty two</a:t>
-            </a:r>
-          </a:p>
-          <a:p>
-            <a:r>
-              <a:t>test images that is fourteen images, from a single run with no seed</a:t>
-            </a:r>
-          </a:p>
-          <a:p>
-            <a:r>
-              <a:t>replication. The methodology committed in advance to treating a difference at</a:t>
-            </a:r>
-          </a:p>
-          <a:p>
-            <a:r>
-              <a:t>that resolution as inconclusive, so I am not claiming DenseNet is the better</a:t>
-            </a:r>
-          </a:p>
-          <a:p>
-            <a:r>
-              <a:t>architecture."</a:t>
+              <a:t>Explain the one pass, three outputs idea:</a:t>
+            </a:r>
+          </a:p>
+          <a:p>
+            <a:r>
+              <a:t>"I take the last dense layer, read its weights and bias, and build a small</a:t>
+            </a:r>
+          </a:p>
+          <a:p>
+            <a:r>
+              <a:t>auxiliary model that gives me the penultimate feature vector. From that vector</a:t>
+            </a:r>
+          </a:p>
+          <a:p>
+            <a:r>
+              <a:t>I recover the logits with the same affine map the model itself would apply, and</a:t>
+            </a:r>
+          </a:p>
+          <a:p>
+            <a:r>
+              <a:t>the probabilities follow from their softmax. So one evaluation gives me the</a:t>
+            </a:r>
+          </a:p>
+          <a:p>
+            <a:r>
+              <a:t>features the detector needs, the logits the energy score needs, and the</a:t>
+            </a:r>
+          </a:p>
+          <a:p>
+            <a:r>
+              <a:t>probabilities the user sees, and all three describe the same forward pass. That</a:t>
+            </a:r>
+          </a:p>
+          <a:p>
+            <a:r>
+              <a:t>correspondence is the point, not the saved computation."</a:t>
             </a:r>
           </a:p>
           <a:p/>
           <a:p>
             <a:r>
-              <a:t>"And the third row is not an architectural result at all. EfficientNetV2S was</a:t>
-            </a:r>
-          </a:p>
-          <a:p>
-            <a:r>
-              <a:t>trained with simple rescaling to zero to one, while its ImageNet weights expect</a:t>
-            </a:r>
-          </a:p>
-          <a:p>
-            <a:r>
-              <a:t>minus one to one. The frozen phase shows the effect cleanly: sixty eight point</a:t>
-            </a:r>
-          </a:p>
-          <a:p>
-            <a:r>
-              <a:t>zero seven per cent against eighty three point two zero. That is a</a:t>
-            </a:r>
-          </a:p>
-          <a:p>
-            <a:r>
-              <a:t>preprocessing fault, not a capacity difference, and I have disclosed it rather</a:t>
-            </a:r>
-          </a:p>
-          <a:p>
-            <a:r>
-              <a:t>than quietly dropping the row."</a:t>
+              <a:t>"On those features I fit one Gaussian per class, with a single shared</a:t>
+            </a:r>
+          </a:p>
+          <a:p>
+            <a:r>
+              <a:t>covariance matrix, and score an input by its distance to the nearest class</a:t>
+            </a:r>
+          </a:p>
+          <a:p>
+            <a:r>
+              <a:t>mean. That is the Mahalanobis signal, from Lee and colleagues, 2018."</a:t>
             </a:r>
           </a:p>
           <a:p/>
           <a:p>
             <a:r>
-              <a:t>"The error structure is the more useful finding. Between sixty nine and seventy</a:t>
-            </a:r>
-          </a:p>
-          <a:p>
-            <a:r>
-              <a:t>six per cent of every model's errors are the same single confusion, bacterial</a:t>
-            </a:r>
-          </a:p>
-          <a:p>
-            <a:r>
-              <a:t>against viral pneumonia. Per class, DenseNet separates COVID-19 and Normal</a:t>
-            </a:r>
-          </a:p>
-          <a:p>
-            <a:r>
-              <a:t>almost perfectly, F1 of point nine seven nine and point nine five nine, while</a:t>
-            </a:r>
-          </a:p>
-          <a:p>
-            <a:r>
-              <a:t>viral pneumonia reaches only point six four one."</a:t>
+              <a:t>"I also compute two output space signals, energy and maximum softmax</a:t>
+            </a:r>
+          </a:p>
+          <a:p>
+            <a:r>
+              <a:t>probability, and report both. The deployed policy uses Mahalanobis alone, and</a:t>
+            </a:r>
+          </a:p>
+          <a:p>
+            <a:r>
+              <a:t>slide 11 shows the measurement that made me choose it."</a:t>
             </a:r>
           </a:p>
           <a:p/>
           <a:p>
             <a:r>
-              <a:t>"So recast as abnormality screening it gives ninety five point eight five per</a:t>
-            </a:r>
-          </a:p>
-          <a:p>
-            <a:r>
-              <a:t>cent sensitivity and ninety eight point nine eight per cent specificity. The</a:t>
-            </a:r>
-          </a:p>
-          <a:p>
-            <a:r>
-              <a:t>task it is good at is screening. The task it is weakest at is exactly the one</a:t>
-            </a:r>
-          </a:p>
-          <a:p>
-            <a:r>
-              <a:t>that carries the antibiotic decision, and that has to be said plainly."</a:t>
+              <a:t>"Calibration runs once per model, on one thousand two hundred training images,</a:t>
+            </a:r>
+          </a:p>
+          <a:p>
+            <a:r>
+              <a:t>thresholded on six hundred validation images, at ninety five per cent retention</a:t>
+            </a:r>
+          </a:p>
+          <a:p>
+            <a:r>
+              <a:t>of genuine scans. The covariance is tied across classes because twelve hundred</a:t>
+            </a:r>
+          </a:p>
+          <a:p>
+            <a:r>
+              <a:t>images is only about four and a half times the two hundred and fifty six</a:t>
+            </a:r>
+          </a:p>
+          <a:p>
+            <a:r>
+              <a:t>dimensions, so four separate matrices would be rank deficient."</a:t>
             </a:r>
           </a:p>
           <a:p/>
           <a:p>
             <a:r>
+              <a:t>"One detail I want to highlight. The safeguard never sees a single invalid</a:t>
+            </a:r>
+          </a:p>
+          <a:p>
+            <a:r>
+              <a:t>example during calibration. The operating point is set entirely from real</a:t>
+            </a:r>
+          </a:p>
+          <a:p>
+            <a:r>
+              <a:t>radiographs. It learns what normal looks like, not what abnormal looks like."</a:t>
+            </a:r>
+          </a:p>
+          <a:p/>
+          <a:p>
+            <a:r>
+              <a:t>On the delivered system:</a:t>
+            </a:r>
+          </a:p>
+          <a:p>
+            <a:r>
+              <a:t>"This is live in the platform, not a notebook. Next.js front end, PHP REST API,</a:t>
+            </a:r>
+          </a:p>
+          <a:p>
+            <a:r>
+              <a:t>a separate Python inference service and MySQL, with four user roles. When the</a:t>
+            </a:r>
+          </a:p>
+          <a:p>
+            <a:r>
+              <a:t>verdict fires the response carries no diagnosis at all, and it survives the</a:t>
+            </a:r>
+          </a:p>
+          <a:p>
+            <a:r>
+              <a:t>round trip, so reopening the case from history still shows none and the</a:t>
+            </a:r>
+          </a:p>
+          <a:p>
+            <a:r>
+              <a:t>exported PDF reproduces the notice in all three languages. Happy to demonstrate</a:t>
+            </a:r>
+          </a:p>
+          <a:p>
+            <a:r>
+              <a:t>it after the talk."</a:t>
+            </a:r>
+          </a:p>
+          <a:p/>
+          <a:p>
+            <a:r>
               <a:t>Delivery:</a:t>
             </a:r>
           </a:p>
           <a:p>
             <a:r>
-              <a:t>- Owning the EfficientNetV2S fault yourself is worth more than defending it.</a:t>
-            </a:r>
-          </a:p>
-          <a:p>
-            <a:r>
-              <a:t>- NFR1 asked for at least eighty five per cent and is met by zero point three</a:t>
-            </a:r>
-          </a:p>
-          <a:p>
-            <a:r>
-              <a:t>  one of a point. If they push, agree it is narrow.</a:t>
+              <a:t>- If they ask why not just threshold the softmax confidence: that is the MSP</a:t>
+            </a:r>
+          </a:p>
+          <a:p>
+            <a:r>
+              <a:t>  baseline, it is computed, and slide 11 shows output space signals failing on</a:t>
+            </a:r>
+          </a:p>
+          <a:p>
+            <a:r>
+              <a:t>  this model. That is the finding.</a:t>
             </a:r>
           </a:p>
         </p:txBody>
@@ -2404,7 +2714,7 @@
           <a:lstStyle/>
           <a:p>
             <a:r>
-              <a:t>[14:30 - 17:00]  RESULTS, INPUT VALIDITY</a:t>
+              <a:t>[12:30 - 14:30]  CONTRIBUTION 2, THE EXPLANATION   (thesis: 4.12.1, 5.3)</a:t>
             </a:r>
           </a:p>
           <a:p/>
@@ -2415,148 +2725,152 @@
           </a:p>
           <a:p>
             <a:r>
-              <a:t>"This is the result I care most about. Three numbers."</a:t>
+              <a:t>"The second contribution is the explanation, and there are two corrections in</a:t>
+            </a:r>
+          </a:p>
+          <a:p>
+            <a:r>
+              <a:t>it."</a:t>
             </a:r>
           </a:p>
           <a:p/>
           <a:p>
             <a:r>
-              <a:t>"Ninety two point five per cent of genuine held out scans are retained, against</a:t>
-            </a:r>
-          </a:p>
-          <a:p>
-            <a:r>
-              <a:t>a design floor of ninety. One hundred per cent of the far probe is flagged, all</a:t>
-            </a:r>
-          </a:p>
-          <a:p>
-            <a:r>
-              <a:t>sixty generated images, against a floor of ninety five. So both operating</a:t>
-            </a:r>
-          </a:p>
-          <a:p>
-            <a:r>
-              <a:t>criteria are met."</a:t>
+              <a:t>"The first is numerical. Grad-CAM is defined on the class score before the</a:t>
+            </a:r>
+          </a:p>
+          <a:p>
+            <a:r>
+              <a:t>softmax. If you differentiate the probability instead, the chain rule brings in</a:t>
+            </a:r>
+          </a:p>
+          <a:p>
+            <a:r>
+              <a:t>a factor that goes to zero exactly when the model is confident. On COVID-19 and</a:t>
+            </a:r>
+          </a:p>
+          <a:p>
+            <a:r>
+              <a:t>Normal this model routinely exceeds point nine seven, so that factor drops</a:t>
+            </a:r>
+          </a:p>
+          <a:p>
+            <a:r>
+              <a:t>below point zero three and the heatmap is numerical noise. I rebuilt the</a:t>
+            </a:r>
+          </a:p>
+          <a:p>
+            <a:r>
+              <a:t>classifier as a linear layer carrying the same weights and differentiate the</a:t>
+            </a:r>
+          </a:p>
+          <a:p>
+            <a:r>
+              <a:t>logit, which removes the factor entirely."</a:t>
             </a:r>
           </a:p>
           <a:p/>
           <a:p>
             <a:r>
-              <a:t>"And the third number is the interesting one. Mahalanobis separates the two</a:t>
-            </a:r>
-          </a:p>
-          <a:p>
-            <a:r>
-              <a:t>populations perfectly, AUROC of one point zero zero zero. Energy, computed from</a:t>
-            </a:r>
-          </a:p>
-          <a:p>
-            <a:r>
-              <a:t>the logits of the very same forward pass, reaches zero point five three nine.</a:t>
-            </a:r>
-          </a:p>
-          <a:p>
-            <a:r>
-              <a:t>That is essentially a coin flip."</a:t>
+              <a:t>"The second is anatomical, and it is the more interesting one. DeGrave and</a:t>
+            </a:r>
+          </a:p>
+          <a:p>
+            <a:r>
+              <a:t>colleagues showed in Nature Machine Intelligence that COVID classifiers often</a:t>
+            </a:r>
+          </a:p>
+          <a:p>
+            <a:r>
+              <a:t>key on shoulders, image borders and burnt in markers instead of lung tissue.</a:t>
+            </a:r>
+          </a:p>
+          <a:p>
+            <a:r>
+              <a:t>Teixeira and colleagues showed that restricting the map to the lung field is</a:t>
+            </a:r>
+          </a:p>
+          <a:p>
+            <a:r>
+              <a:t>the remedy. So I estimate the lung field with classical computer vision, no</a:t>
+            </a:r>
+          </a:p>
+          <a:p>
+            <a:r>
+              <a:t>extra trained weights, and restrict the displayed map to it."</a:t>
             </a:r>
           </a:p>
           <a:p/>
           <a:p>
             <a:r>
-              <a:t>Explain why, this is the insight:</a:t>
-            </a:r>
-          </a:p>
-          <a:p>
-            <a:r>
-              <a:t>"Energy is a function of the logits. If a model produces large logits for</a:t>
-            </a:r>
-          </a:p>
-          <a:p>
-            <a:r>
-              <a:t>inputs it has never seen, and that is precisely the documented overconfidence,</a:t>
-            </a:r>
-          </a:p>
-          <a:p>
-            <a:r>
-              <a:t>then energy has nothing to work with. Mahalanobis operates before that</a:t>
-            </a:r>
-          </a:p>
-          <a:p>
-            <a:r>
-              <a:t>collapse, in the feature space, where the input still looks unfamiliar."</a:t>
+              <a:t>Now the honest part, and say it deliberately:</a:t>
+            </a:r>
+          </a:p>
+          <a:p>
+            <a:r>
+              <a:t>"But masking only changes what is shown. It does not stop the classifier using</a:t>
+            </a:r>
+          </a:p>
+          <a:p>
+            <a:r>
+              <a:t>pixels outside the lungs. So I measure how much of the attention was inside the</a:t>
+            </a:r>
+          </a:p>
+          <a:p>
+            <a:r>
+              <a:t>lung field before masking, and I report that number with every scan. If it</a:t>
+            </a:r>
+          </a:p>
+          <a:p>
+            <a:r>
+              <a:t>falls below one half, the user gets a caution."</a:t>
             </a:r>
           </a:p>
           <a:p/>
           <a:p>
             <a:r>
-              <a:t>"The practical lesson is that which signal works has to be measured on your own</a:t>
-            </a:r>
-          </a:p>
-          <a:p>
-            <a:r>
-              <a:t>model, not adopted from a paper. If I had taken energy on authority, I would</a:t>
-            </a:r>
-          </a:p>
-          <a:p>
-            <a:r>
-              <a:t>have shipped a safeguard that does not work."</a:t>
+              <a:t>"On the scan in the thesis that share was zero point three five zero, so the</a:t>
+            </a:r>
+          </a:p>
+          <a:p>
+            <a:r>
+              <a:t>caution fired, on a radiograph the model classified correctly at ninety nine</a:t>
+            </a:r>
+          </a:p>
+          <a:p>
+            <a:r>
+              <a:t>point nine per cent confidence. That is the sharpest evidence I have for why</a:t>
+            </a:r>
+          </a:p>
+          <a:p>
+            <a:r>
+              <a:t>the number is disclosed at all: the masked picture looks convincing while most</a:t>
+            </a:r>
+          </a:p>
+          <a:p>
+            <a:r>
+              <a:t>of the attention behind it was not on the lungs, and no system in my literature</a:t>
+            </a:r>
+          </a:p>
+          <a:p>
+            <a:r>
+              <a:t>table reports that quantity."</a:t>
             </a:r>
           </a:p>
           <a:p/>
           <a:p>
             <a:r>
-              <a:t>Now state the limitation before they do:</a:t>
-            </a:r>
-          </a:p>
-          <a:p>
-            <a:r>
-              <a:t>"I want to be explicit about what that AUROC of one point zero zero zero is</a:t>
-            </a:r>
-          </a:p>
-          <a:p>
-            <a:r>
-              <a:t>against. Sixty generated images: uniform noise, smooth gradients and solid</a:t>
-            </a:r>
-          </a:p>
-          <a:p>
-            <a:r>
-              <a:t>colour blocks, from a fixed seed. That is a far regime sanity check. It is not</a:t>
-            </a:r>
-          </a:p>
-          <a:p>
-            <a:r>
-              <a:t>validation against real photographs, and it is not the near regime, a genuine</a:t>
-            </a:r>
-          </a:p>
-          <a:p>
-            <a:r>
-              <a:t>chest X-ray of a condition the model was never trained on. That case is</a:t>
-            </a:r>
-          </a:p>
-          <a:p>
-            <a:r>
-              <a:t>completely untested, and it is the first item in my future work."</a:t>
-            </a:r>
-          </a:p>
-          <a:p/>
-          <a:p>
-            <a:r>
               <a:t>Delivery:</a:t>
             </a:r>
           </a:p>
           <a:p>
             <a:r>
-              <a:t>- Say the limitation in your own voice before the panel asks. If they have to</a:t>
-            </a:r>
-          </a:p>
-          <a:p>
-            <a:r>
-              <a:t>  drag it out of you it reads as a weakness; if you volunteer it, it reads as</a:t>
-            </a:r>
-          </a:p>
-          <a:p>
-            <a:r>
-              <a:t>  judgement.</a:t>
+              <a:t>- This is the slide that shows research maturity. You found a fix that makes</a:t>
+            </a:r>
+          </a:p>
+          <a:p>
+            <a:r>
+              <a:t>  your own output look better and you refused to let it stand alone.</a:t>
             </a:r>
           </a:p>
         </p:txBody>
@@ -6228,7 +6542,7 @@
                 </a:solidFill>
                 <a:latin typeface="Segoe UI"/>
               </a:rPr>
-              <a:t>4</a:t>
+              <a:t>6</a:t>
             </a:r>
           </a:p>
         </p:txBody>
@@ -7287,7 +7601,7 @@
                 </a:solidFill>
                 <a:latin typeface="Segoe UI"/>
               </a:rPr>
-              <a:t>5</a:t>
+              <a:t>7</a:t>
             </a:r>
           </a:p>
         </p:txBody>
@@ -9446,7 +9760,7 @@
                 </a:solidFill>
                 <a:latin typeface="Segoe UI"/>
               </a:rPr>
-              <a:t>6</a:t>
+              <a:t>8</a:t>
             </a:r>
           </a:p>
         </p:txBody>
@@ -11000,7 +11314,7 @@
                 </a:solidFill>
                 <a:latin typeface="Segoe UI"/>
               </a:rPr>
-              <a:t>7</a:t>
+              <a:t>9</a:t>
             </a:r>
           </a:p>
         </p:txBody>
@@ -11918,7 +12232,7 @@
                 </a:solidFill>
                 <a:latin typeface="Segoe UI"/>
               </a:rPr>
-              <a:t>8</a:t>
+              <a:t>10</a:t>
             </a:r>
           </a:p>
         </p:txBody>
@@ -13603,7 +13917,7 @@
                 </a:solidFill>
                 <a:latin typeface="Segoe UI"/>
               </a:rPr>
-              <a:t>9</a:t>
+              <a:t>11</a:t>
             </a:r>
           </a:p>
         </p:txBody>
@@ -15508,7 +15822,7 @@
                 </a:solidFill>
                 <a:latin typeface="Segoe UI"/>
               </a:rPr>
-              <a:t>10</a:t>
+              <a:t>12</a:t>
             </a:r>
           </a:p>
         </p:txBody>
@@ -18128,6 +18442,1568 @@
 </p:sld>
 </file>
 
+<file path=ppt/slides/slide6.xml><?xml version="1.0" encoding="utf-8"?>
+<p:sld xmlns:a="http://schemas.openxmlformats.org/drawingml/2006/main" xmlns:p="http://schemas.openxmlformats.org/presentationml/2006/main" xmlns:r="http://schemas.openxmlformats.org/officeDocument/2006/relationships">
+  <p:cSld>
+    <p:spTree>
+      <p:nvGrpSpPr>
+        <p:cNvPr id="1" name=""/>
+        <p:cNvGrpSpPr/>
+        <p:nvPr/>
+      </p:nvGrpSpPr>
+      <p:grpSpPr/>
+      <p:sp>
+        <p:nvSpPr>
+          <p:cNvPr id="2" name="TextBox 1"/>
+          <p:cNvSpPr txBox="1"/>
+          <p:nvPr/>
+        </p:nvSpPr>
+        <p:spPr>
+          <a:xfrm>
+            <a:off x="658368" y="566928"/>
+            <a:ext cx="10874959" cy="237744"/>
+          </a:xfrm>
+          <a:prstGeom prst="rect">
+            <a:avLst/>
+          </a:prstGeom>
+          <a:noFill/>
+        </p:spPr>
+        <p:txBody>
+          <a:bodyPr wrap="square" anchor="t" lIns="0" rIns="0" tIns="0" bIns="0">
+            <a:spAutoFit/>
+          </a:bodyPr>
+          <a:lstStyle/>
+          <a:p>
+            <a:pPr algn="l">
+              <a:lnSpc>
+                <a:spcPct val="118000"/>
+              </a:lnSpc>
+              <a:spcAft>
+                <a:spcPts val="600"/>
+              </a:spcAft>
+            </a:pPr>
+            <a:r>
+              <a:rPr sz="1050" b="1" i="0">
+                <a:solidFill>
+                  <a:srgbClr val="147D9B"/>
+                </a:solidFill>
+                <a:latin typeface="Segoe UI"/>
+              </a:rPr>
+              <a:t>LITERATURE REVIEW  ·  THE GAP</a:t>
+            </a:r>
+          </a:p>
+        </p:txBody>
+      </p:sp>
+      <p:sp>
+        <p:nvSpPr>
+          <p:cNvPr id="3" name="TextBox 2"/>
+          <p:cNvSpPr txBox="1"/>
+          <p:nvPr/>
+        </p:nvSpPr>
+        <p:spPr>
+          <a:xfrm>
+            <a:off x="658368" y="877824"/>
+            <a:ext cx="10874959" cy="566928"/>
+          </a:xfrm>
+          <a:prstGeom prst="rect">
+            <a:avLst/>
+          </a:prstGeom>
+          <a:noFill/>
+        </p:spPr>
+        <p:txBody>
+          <a:bodyPr wrap="none" anchor="t" lIns="0" rIns="0" tIns="0" bIns="0">
+            <a:spAutoFit/>
+          </a:bodyPr>
+          <a:lstStyle/>
+          <a:p>
+            <a:pPr algn="l">
+              <a:lnSpc>
+                <a:spcPct val="102000"/>
+              </a:lnSpc>
+              <a:spcAft>
+                <a:spcPts val="600"/>
+              </a:spcAft>
+            </a:pPr>
+            <a:r>
+              <a:rPr sz="2700" b="1" i="0">
+                <a:solidFill>
+                  <a:srgbClr val="0B2B4A"/>
+                </a:solidFill>
+                <a:latin typeface="Segoe UI"/>
+              </a:rPr>
+              <a:t>No reviewed system checks input validity</a:t>
+            </a:r>
+          </a:p>
+        </p:txBody>
+      </p:sp>
+      <p:sp>
+        <p:nvSpPr>
+          <p:cNvPr id="4" name="Rectangle 3"/>
+          <p:cNvSpPr/>
+          <p:nvPr/>
+        </p:nvSpPr>
+        <p:spPr>
+          <a:xfrm>
+            <a:off x="658368" y="1499616"/>
+            <a:ext cx="1051560" cy="33020"/>
+          </a:xfrm>
+          <a:prstGeom prst="rect">
+            <a:avLst/>
+          </a:prstGeom>
+          <a:solidFill>
+            <a:srgbClr val="147D9B"/>
+          </a:solidFill>
+          <a:ln>
+            <a:noFill/>
+          </a:ln>
+          <a:effectLst/>
+        </p:spPr>
+        <p:style>
+          <a:lnRef idx="1">
+            <a:schemeClr val="accent1"/>
+          </a:lnRef>
+          <a:fillRef idx="3">
+            <a:schemeClr val="accent1"/>
+          </a:fillRef>
+          <a:effectRef idx="2">
+            <a:schemeClr val="accent1"/>
+          </a:effectRef>
+          <a:fontRef idx="minor">
+            <a:schemeClr val="lt1"/>
+          </a:fontRef>
+        </p:style>
+        <p:txBody>
+          <a:bodyPr rtlCol="0" anchor="ctr"/>
+          <a:lstStyle/>
+          <a:p/>
+        </p:txBody>
+      </p:sp>
+      <p:sp>
+        <p:nvSpPr>
+          <p:cNvPr id="5" name="Rectangle 4"/>
+          <p:cNvSpPr/>
+          <p:nvPr/>
+        </p:nvSpPr>
+        <p:spPr>
+          <a:xfrm>
+            <a:off x="658368" y="6382512"/>
+            <a:ext cx="10874959" cy="11430"/>
+          </a:xfrm>
+          <a:prstGeom prst="rect">
+            <a:avLst/>
+          </a:prstGeom>
+          <a:solidFill>
+            <a:srgbClr val="D8E5EE"/>
+          </a:solidFill>
+          <a:ln>
+            <a:noFill/>
+          </a:ln>
+          <a:effectLst/>
+        </p:spPr>
+        <p:style>
+          <a:lnRef idx="1">
+            <a:schemeClr val="accent1"/>
+          </a:lnRef>
+          <a:fillRef idx="3">
+            <a:schemeClr val="accent1"/>
+          </a:fillRef>
+          <a:effectRef idx="2">
+            <a:schemeClr val="accent1"/>
+          </a:effectRef>
+          <a:fontRef idx="minor">
+            <a:schemeClr val="lt1"/>
+          </a:fontRef>
+        </p:style>
+        <p:txBody>
+          <a:bodyPr rtlCol="0" anchor="ctr"/>
+          <a:lstStyle/>
+          <a:p/>
+        </p:txBody>
+      </p:sp>
+      <p:sp>
+        <p:nvSpPr>
+          <p:cNvPr id="6" name="TextBox 5"/>
+          <p:cNvSpPr txBox="1"/>
+          <p:nvPr/>
+        </p:nvSpPr>
+        <p:spPr>
+          <a:xfrm>
+            <a:off x="658368" y="6473952"/>
+            <a:ext cx="7315200" cy="256032"/>
+          </a:xfrm>
+          <a:prstGeom prst="rect">
+            <a:avLst/>
+          </a:prstGeom>
+          <a:noFill/>
+        </p:spPr>
+        <p:txBody>
+          <a:bodyPr wrap="square" anchor="t" lIns="0" rIns="0" tIns="0" bIns="0">
+            <a:spAutoFit/>
+          </a:bodyPr>
+          <a:lstStyle/>
+          <a:p>
+            <a:pPr algn="l">
+              <a:lnSpc>
+                <a:spcPct val="118000"/>
+              </a:lnSpc>
+              <a:spcAft>
+                <a:spcPts val="600"/>
+              </a:spcAft>
+            </a:pPr>
+            <a:r>
+              <a:rPr sz="900" b="0" i="0">
+                <a:solidFill>
+                  <a:srgbClr val="647C93"/>
+                </a:solidFill>
+                <a:latin typeface="Segoe UI"/>
+              </a:rPr>
+              <a:t>LungVision AI  ·  G. C. M. Sewwandi  ·  29002</a:t>
+            </a:r>
+          </a:p>
+        </p:txBody>
+      </p:sp>
+      <p:sp>
+        <p:nvSpPr>
+          <p:cNvPr id="7" name="TextBox 6"/>
+          <p:cNvSpPr txBox="1"/>
+          <p:nvPr/>
+        </p:nvSpPr>
+        <p:spPr>
+          <a:xfrm>
+            <a:off x="10436047" y="6473952"/>
+            <a:ext cx="1097280" cy="256032"/>
+          </a:xfrm>
+          <a:prstGeom prst="rect">
+            <a:avLst/>
+          </a:prstGeom>
+          <a:noFill/>
+        </p:spPr>
+        <p:txBody>
+          <a:bodyPr wrap="square" anchor="t" lIns="0" rIns="0" tIns="0" bIns="0">
+            <a:spAutoFit/>
+          </a:bodyPr>
+          <a:lstStyle/>
+          <a:p>
+            <a:pPr algn="r">
+              <a:lnSpc>
+                <a:spcPct val="118000"/>
+              </a:lnSpc>
+              <a:spcAft>
+                <a:spcPts val="600"/>
+              </a:spcAft>
+            </a:pPr>
+            <a:r>
+              <a:rPr sz="900" b="0" i="0">
+                <a:solidFill>
+                  <a:srgbClr val="647C93"/>
+                </a:solidFill>
+                <a:latin typeface="Segoe UI"/>
+              </a:rPr>
+              <a:t>5</a:t>
+            </a:r>
+          </a:p>
+        </p:txBody>
+      </p:sp>
+      <p:graphicFrame>
+        <p:nvGraphicFramePr>
+          <p:cNvPr id="8" name="Table 7"/>
+          <p:cNvGraphicFramePr>
+            <a:graphicFrameLocks noGrp="1"/>
+          </p:cNvGraphicFramePr>
+          <p:nvPr/>
+        </p:nvGraphicFramePr>
+        <p:xfrm>
+          <a:off x="658368" y="1572768"/>
+          <a:ext cx="10874957" cy="3035808"/>
+        </p:xfrm>
+        <a:graphic>
+          <a:graphicData uri="http://schemas.openxmlformats.org/drawingml/2006/table">
+            <a:tbl>
+              <a:tblPr>
+                <a:tableStyleId>{5C22544A-7EE6-4342-B048-85BDC9FD1C3A}</a:tableStyleId>
+              </a:tblPr>
+              <a:tblGrid>
+                <a:gridCol w="2745135"/>
+                <a:gridCol w="2006060"/>
+                <a:gridCol w="2745135"/>
+                <a:gridCol w="2322806"/>
+                <a:gridCol w="1055821"/>
+              </a:tblGrid>
+              <a:tr h="347472">
+                <a:tc>
+                  <a:txBody>
+                    <a:bodyPr wrap="square"/>
+                    <a:lstStyle/>
+                    <a:p>
+                      <a:pPr algn="l"/>
+                      <a:r>
+                        <a:rPr sz="1050" b="1">
+                          <a:solidFill>
+                            <a:srgbClr val="FFFFFF"/>
+                          </a:solidFill>
+                          <a:latin typeface="Segoe UI"/>
+                        </a:rPr>
+                        <a:t>Study</a:t>
+                      </a:r>
+                    </a:p>
+                  </a:txBody>
+                  <a:tcPr marL="91440" marR="91440" marT="27432" marB="27432" anchor="ctr">
+                    <a:solidFill>
+                      <a:srgbClr val="0E5A72"/>
+                    </a:solidFill>
+                  </a:tcPr>
+                </a:tc>
+                <a:tc>
+                  <a:txBody>
+                    <a:bodyPr wrap="square"/>
+                    <a:lstStyle/>
+                    <a:p>
+                      <a:pPr algn="l"/>
+                      <a:r>
+                        <a:rPr sz="1050" b="1">
+                          <a:solidFill>
+                            <a:srgbClr val="FFFFFF"/>
+                          </a:solidFill>
+                          <a:latin typeface="Segoe UI"/>
+                        </a:rPr>
+                        <a:t>Classes</a:t>
+                      </a:r>
+                    </a:p>
+                  </a:txBody>
+                  <a:tcPr marL="91440" marR="91440" marT="27432" marB="27432" anchor="ctr">
+                    <a:solidFill>
+                      <a:srgbClr val="0E5A72"/>
+                    </a:solidFill>
+                  </a:tcPr>
+                </a:tc>
+                <a:tc>
+                  <a:txBody>
+                    <a:bodyPr wrap="square"/>
+                    <a:lstStyle/>
+                    <a:p>
+                      <a:pPr algn="l"/>
+                      <a:r>
+                        <a:rPr sz="1050" b="1">
+                          <a:solidFill>
+                            <a:srgbClr val="FFFFFF"/>
+                          </a:solidFill>
+                          <a:latin typeface="Segoe UI"/>
+                        </a:rPr>
+                        <a:t>Explainability</a:t>
+                      </a:r>
+                    </a:p>
+                  </a:txBody>
+                  <a:tcPr marL="91440" marR="91440" marT="27432" marB="27432" anchor="ctr">
+                    <a:solidFill>
+                      <a:srgbClr val="0E5A72"/>
+                    </a:solidFill>
+                  </a:tcPr>
+                </a:tc>
+                <a:tc>
+                  <a:txBody>
+                    <a:bodyPr wrap="square"/>
+                    <a:lstStyle/>
+                    <a:p>
+                      <a:pPr algn="l"/>
+                      <a:r>
+                        <a:rPr sz="1050" b="1">
+                          <a:solidFill>
+                            <a:srgbClr val="FFFFFF"/>
+                          </a:solidFill>
+                          <a:latin typeface="Segoe UI"/>
+                        </a:rPr>
+                        <a:t>Input validity check</a:t>
+                      </a:r>
+                    </a:p>
+                  </a:txBody>
+                  <a:tcPr marL="91440" marR="91440" marT="27432" marB="27432" anchor="ctr">
+                    <a:solidFill>
+                      <a:srgbClr val="0E5A72"/>
+                    </a:solidFill>
+                  </a:tcPr>
+                </a:tc>
+                <a:tc>
+                  <a:txBody>
+                    <a:bodyPr wrap="square"/>
+                    <a:lstStyle/>
+                    <a:p>
+                      <a:pPr algn="l"/>
+                      <a:r>
+                        <a:rPr sz="1050" b="1">
+                          <a:solidFill>
+                            <a:srgbClr val="FFFFFF"/>
+                          </a:solidFill>
+                          <a:latin typeface="Segoe UI"/>
+                        </a:rPr>
+                        <a:t>Deployed</a:t>
+                      </a:r>
+                    </a:p>
+                  </a:txBody>
+                  <a:tcPr marL="91440" marR="91440" marT="27432" marB="27432" anchor="ctr">
+                    <a:solidFill>
+                      <a:srgbClr val="0E5A72"/>
+                    </a:solidFill>
+                  </a:tcPr>
+                </a:tc>
+              </a:tr>
+              <a:tr h="384048">
+                <a:tc>
+                  <a:txBody>
+                    <a:bodyPr wrap="square"/>
+                    <a:lstStyle/>
+                    <a:p>
+                      <a:pPr algn="l"/>
+                      <a:r>
+                        <a:rPr sz="1050" b="1">
+                          <a:solidFill>
+                            <a:srgbClr val="0B2B4A"/>
+                          </a:solidFill>
+                          <a:latin typeface="Segoe UI"/>
+                        </a:rPr>
+                        <a:t>Rajpurkar et al. [9]</a:t>
+                      </a:r>
+                    </a:p>
+                  </a:txBody>
+                  <a:tcPr marL="91440" marR="91440" marT="27432" marB="27432" anchor="ctr">
+                    <a:solidFill>
+                      <a:srgbClr val="FFFFFF"/>
+                    </a:solidFill>
+                  </a:tcPr>
+                </a:tc>
+                <a:tc>
+                  <a:txBody>
+                    <a:bodyPr wrap="square"/>
+                    <a:lstStyle/>
+                    <a:p>
+                      <a:pPr algn="l"/>
+                      <a:r>
+                        <a:rPr sz="1050" b="0">
+                          <a:solidFill>
+                            <a:srgbClr val="243B53"/>
+                          </a:solidFill>
+                          <a:latin typeface="Segoe UI"/>
+                        </a:rPr>
+                        <a:t>Pneumonia vs rest</a:t>
+                      </a:r>
+                    </a:p>
+                  </a:txBody>
+                  <a:tcPr marL="91440" marR="91440" marT="27432" marB="27432" anchor="ctr">
+                    <a:solidFill>
+                      <a:srgbClr val="FFFFFF"/>
+                    </a:solidFill>
+                  </a:tcPr>
+                </a:tc>
+                <a:tc>
+                  <a:txBody>
+                    <a:bodyPr wrap="square"/>
+                    <a:lstStyle/>
+                    <a:p>
+                      <a:pPr algn="l"/>
+                      <a:r>
+                        <a:rPr sz="1050" b="0">
+                          <a:solidFill>
+                            <a:srgbClr val="243B53"/>
+                          </a:solidFill>
+                          <a:latin typeface="Segoe UI"/>
+                        </a:rPr>
+                        <a:t>CAM, qualitative</a:t>
+                      </a:r>
+                    </a:p>
+                  </a:txBody>
+                  <a:tcPr marL="91440" marR="91440" marT="27432" marB="27432" anchor="ctr">
+                    <a:solidFill>
+                      <a:srgbClr val="FFFFFF"/>
+                    </a:solidFill>
+                  </a:tcPr>
+                </a:tc>
+                <a:tc>
+                  <a:txBody>
+                    <a:bodyPr wrap="square"/>
+                    <a:lstStyle/>
+                    <a:p>
+                      <a:pPr algn="l"/>
+                      <a:r>
+                        <a:rPr sz="1050" b="0">
+                          <a:solidFill>
+                            <a:srgbClr val="243B53"/>
+                          </a:solidFill>
+                          <a:latin typeface="Segoe UI"/>
+                        </a:rPr>
+                        <a:t>None reported</a:t>
+                      </a:r>
+                    </a:p>
+                  </a:txBody>
+                  <a:tcPr marL="91440" marR="91440" marT="27432" marB="27432" anchor="ctr">
+                    <a:solidFill>
+                      <a:srgbClr val="FFFFFF"/>
+                    </a:solidFill>
+                  </a:tcPr>
+                </a:tc>
+                <a:tc>
+                  <a:txBody>
+                    <a:bodyPr wrap="square"/>
+                    <a:lstStyle/>
+                    <a:p>
+                      <a:pPr algn="l"/>
+                      <a:r>
+                        <a:rPr sz="1050" b="0">
+                          <a:solidFill>
+                            <a:srgbClr val="243B53"/>
+                          </a:solidFill>
+                          <a:latin typeface="Segoe UI"/>
+                        </a:rPr>
+                        <a:t>No</a:t>
+                      </a:r>
+                    </a:p>
+                  </a:txBody>
+                  <a:tcPr marL="91440" marR="91440" marT="27432" marB="27432" anchor="ctr">
+                    <a:solidFill>
+                      <a:srgbClr val="FFFFFF"/>
+                    </a:solidFill>
+                  </a:tcPr>
+                </a:tc>
+              </a:tr>
+              <a:tr h="384048">
+                <a:tc>
+                  <a:txBody>
+                    <a:bodyPr wrap="square"/>
+                    <a:lstStyle/>
+                    <a:p>
+                      <a:pPr algn="l"/>
+                      <a:r>
+                        <a:rPr sz="1050" b="1">
+                          <a:solidFill>
+                            <a:srgbClr val="0B2B4A"/>
+                          </a:solidFill>
+                          <a:latin typeface="Segoe UI"/>
+                        </a:rPr>
+                        <a:t>Apostolopoulos &amp; Mpesiana [12]</a:t>
+                      </a:r>
+                    </a:p>
+                  </a:txBody>
+                  <a:tcPr marL="91440" marR="91440" marT="27432" marB="27432" anchor="ctr">
+                    <a:solidFill>
+                      <a:srgbClr val="F3F8FB"/>
+                    </a:solidFill>
+                  </a:tcPr>
+                </a:tc>
+                <a:tc>
+                  <a:txBody>
+                    <a:bodyPr wrap="square"/>
+                    <a:lstStyle/>
+                    <a:p>
+                      <a:pPr algn="l"/>
+                      <a:r>
+                        <a:rPr sz="1050" b="0">
+                          <a:solidFill>
+                            <a:srgbClr val="243B53"/>
+                          </a:solidFill>
+                          <a:latin typeface="Segoe UI"/>
+                        </a:rPr>
+                        <a:t>Binary and three class</a:t>
+                      </a:r>
+                    </a:p>
+                  </a:txBody>
+                  <a:tcPr marL="91440" marR="91440" marT="27432" marB="27432" anchor="ctr">
+                    <a:solidFill>
+                      <a:srgbClr val="F3F8FB"/>
+                    </a:solidFill>
+                  </a:tcPr>
+                </a:tc>
+                <a:tc>
+                  <a:txBody>
+                    <a:bodyPr wrap="square"/>
+                    <a:lstStyle/>
+                    <a:p>
+                      <a:pPr algn="l"/>
+                      <a:r>
+                        <a:rPr sz="1050" b="0">
+                          <a:solidFill>
+                            <a:srgbClr val="243B53"/>
+                          </a:solidFill>
+                          <a:latin typeface="Segoe UI"/>
+                        </a:rPr>
+                        <a:t>None reported</a:t>
+                      </a:r>
+                    </a:p>
+                  </a:txBody>
+                  <a:tcPr marL="91440" marR="91440" marT="27432" marB="27432" anchor="ctr">
+                    <a:solidFill>
+                      <a:srgbClr val="F3F8FB"/>
+                    </a:solidFill>
+                  </a:tcPr>
+                </a:tc>
+                <a:tc>
+                  <a:txBody>
+                    <a:bodyPr wrap="square"/>
+                    <a:lstStyle/>
+                    <a:p>
+                      <a:pPr algn="l"/>
+                      <a:r>
+                        <a:rPr sz="1050" b="0">
+                          <a:solidFill>
+                            <a:srgbClr val="243B53"/>
+                          </a:solidFill>
+                          <a:latin typeface="Segoe UI"/>
+                        </a:rPr>
+                        <a:t>None reported</a:t>
+                      </a:r>
+                    </a:p>
+                  </a:txBody>
+                  <a:tcPr marL="91440" marR="91440" marT="27432" marB="27432" anchor="ctr">
+                    <a:solidFill>
+                      <a:srgbClr val="F3F8FB"/>
+                    </a:solidFill>
+                  </a:tcPr>
+                </a:tc>
+                <a:tc>
+                  <a:txBody>
+                    <a:bodyPr wrap="square"/>
+                    <a:lstStyle/>
+                    <a:p>
+                      <a:pPr algn="l"/>
+                      <a:r>
+                        <a:rPr sz="1050" b="0">
+                          <a:solidFill>
+                            <a:srgbClr val="243B53"/>
+                          </a:solidFill>
+                          <a:latin typeface="Segoe UI"/>
+                        </a:rPr>
+                        <a:t>No</a:t>
+                      </a:r>
+                    </a:p>
+                  </a:txBody>
+                  <a:tcPr marL="91440" marR="91440" marT="27432" marB="27432" anchor="ctr">
+                    <a:solidFill>
+                      <a:srgbClr val="F3F8FB"/>
+                    </a:solidFill>
+                  </a:tcPr>
+                </a:tc>
+              </a:tr>
+              <a:tr h="384048">
+                <a:tc>
+                  <a:txBody>
+                    <a:bodyPr wrap="square"/>
+                    <a:lstStyle/>
+                    <a:p>
+                      <a:pPr algn="l"/>
+                      <a:r>
+                        <a:rPr sz="1050" b="1">
+                          <a:solidFill>
+                            <a:srgbClr val="0B2B4A"/>
+                          </a:solidFill>
+                          <a:latin typeface="Segoe UI"/>
+                        </a:rPr>
+                        <a:t>Ozturk et al. [13]</a:t>
+                      </a:r>
+                    </a:p>
+                  </a:txBody>
+                  <a:tcPr marL="91440" marR="91440" marT="27432" marB="27432" anchor="ctr">
+                    <a:solidFill>
+                      <a:srgbClr val="FFFFFF"/>
+                    </a:solidFill>
+                  </a:tcPr>
+                </a:tc>
+                <a:tc>
+                  <a:txBody>
+                    <a:bodyPr wrap="square"/>
+                    <a:lstStyle/>
+                    <a:p>
+                      <a:pPr algn="l"/>
+                      <a:r>
+                        <a:rPr sz="1050" b="0">
+                          <a:solidFill>
+                            <a:srgbClr val="243B53"/>
+                          </a:solidFill>
+                          <a:latin typeface="Segoe UI"/>
+                        </a:rPr>
+                        <a:t>Binary and three class</a:t>
+                      </a:r>
+                    </a:p>
+                  </a:txBody>
+                  <a:tcPr marL="91440" marR="91440" marT="27432" marB="27432" anchor="ctr">
+                    <a:solidFill>
+                      <a:srgbClr val="FFFFFF"/>
+                    </a:solidFill>
+                  </a:tcPr>
+                </a:tc>
+                <a:tc>
+                  <a:txBody>
+                    <a:bodyPr wrap="square"/>
+                    <a:lstStyle/>
+                    <a:p>
+                      <a:pPr algn="l"/>
+                      <a:r>
+                        <a:rPr sz="1050" b="0">
+                          <a:solidFill>
+                            <a:srgbClr val="243B53"/>
+                          </a:solidFill>
+                          <a:latin typeface="Segoe UI"/>
+                        </a:rPr>
+                        <a:t>Heatmaps, qualitative</a:t>
+                      </a:r>
+                    </a:p>
+                  </a:txBody>
+                  <a:tcPr marL="91440" marR="91440" marT="27432" marB="27432" anchor="ctr">
+                    <a:solidFill>
+                      <a:srgbClr val="FFFFFF"/>
+                    </a:solidFill>
+                  </a:tcPr>
+                </a:tc>
+                <a:tc>
+                  <a:txBody>
+                    <a:bodyPr wrap="square"/>
+                    <a:lstStyle/>
+                    <a:p>
+                      <a:pPr algn="l"/>
+                      <a:r>
+                        <a:rPr sz="1050" b="0">
+                          <a:solidFill>
+                            <a:srgbClr val="243B53"/>
+                          </a:solidFill>
+                          <a:latin typeface="Segoe UI"/>
+                        </a:rPr>
+                        <a:t>None reported</a:t>
+                      </a:r>
+                    </a:p>
+                  </a:txBody>
+                  <a:tcPr marL="91440" marR="91440" marT="27432" marB="27432" anchor="ctr">
+                    <a:solidFill>
+                      <a:srgbClr val="FFFFFF"/>
+                    </a:solidFill>
+                  </a:tcPr>
+                </a:tc>
+                <a:tc>
+                  <a:txBody>
+                    <a:bodyPr wrap="square"/>
+                    <a:lstStyle/>
+                    <a:p>
+                      <a:pPr algn="l"/>
+                      <a:r>
+                        <a:rPr sz="1050" b="0">
+                          <a:solidFill>
+                            <a:srgbClr val="243B53"/>
+                          </a:solidFill>
+                          <a:latin typeface="Segoe UI"/>
+                        </a:rPr>
+                        <a:t>No</a:t>
+                      </a:r>
+                    </a:p>
+                  </a:txBody>
+                  <a:tcPr marL="91440" marR="91440" marT="27432" marB="27432" anchor="ctr">
+                    <a:solidFill>
+                      <a:srgbClr val="FFFFFF"/>
+                    </a:solidFill>
+                  </a:tcPr>
+                </a:tc>
+              </a:tr>
+              <a:tr h="384048">
+                <a:tc>
+                  <a:txBody>
+                    <a:bodyPr wrap="square"/>
+                    <a:lstStyle/>
+                    <a:p>
+                      <a:pPr algn="l"/>
+                      <a:r>
+                        <a:rPr sz="1050" b="1">
+                          <a:solidFill>
+                            <a:srgbClr val="0B2B4A"/>
+                          </a:solidFill>
+                          <a:latin typeface="Segoe UI"/>
+                        </a:rPr>
+                        <a:t>Narin et al. [14]</a:t>
+                      </a:r>
+                    </a:p>
+                  </a:txBody>
+                  <a:tcPr marL="91440" marR="91440" marT="27432" marB="27432" anchor="ctr">
+                    <a:solidFill>
+                      <a:srgbClr val="F3F8FB"/>
+                    </a:solidFill>
+                  </a:tcPr>
+                </a:tc>
+                <a:tc>
+                  <a:txBody>
+                    <a:bodyPr wrap="square"/>
+                    <a:lstStyle/>
+                    <a:p>
+                      <a:pPr algn="l"/>
+                      <a:r>
+                        <a:rPr sz="1050" b="0">
+                          <a:solidFill>
+                            <a:srgbClr val="243B53"/>
+                          </a:solidFill>
+                          <a:latin typeface="Segoe UI"/>
+                        </a:rPr>
+                        <a:t>Binary COVID-19</a:t>
+                      </a:r>
+                    </a:p>
+                  </a:txBody>
+                  <a:tcPr marL="91440" marR="91440" marT="27432" marB="27432" anchor="ctr">
+                    <a:solidFill>
+                      <a:srgbClr val="F3F8FB"/>
+                    </a:solidFill>
+                  </a:tcPr>
+                </a:tc>
+                <a:tc>
+                  <a:txBody>
+                    <a:bodyPr wrap="square"/>
+                    <a:lstStyle/>
+                    <a:p>
+                      <a:pPr algn="l"/>
+                      <a:r>
+                        <a:rPr sz="1050" b="0">
+                          <a:solidFill>
+                            <a:srgbClr val="243B53"/>
+                          </a:solidFill>
+                          <a:latin typeface="Segoe UI"/>
+                        </a:rPr>
+                        <a:t>None reported</a:t>
+                      </a:r>
+                    </a:p>
+                  </a:txBody>
+                  <a:tcPr marL="91440" marR="91440" marT="27432" marB="27432" anchor="ctr">
+                    <a:solidFill>
+                      <a:srgbClr val="F3F8FB"/>
+                    </a:solidFill>
+                  </a:tcPr>
+                </a:tc>
+                <a:tc>
+                  <a:txBody>
+                    <a:bodyPr wrap="square"/>
+                    <a:lstStyle/>
+                    <a:p>
+                      <a:pPr algn="l"/>
+                      <a:r>
+                        <a:rPr sz="1050" b="0">
+                          <a:solidFill>
+                            <a:srgbClr val="243B53"/>
+                          </a:solidFill>
+                          <a:latin typeface="Segoe UI"/>
+                        </a:rPr>
+                        <a:t>None reported</a:t>
+                      </a:r>
+                    </a:p>
+                  </a:txBody>
+                  <a:tcPr marL="91440" marR="91440" marT="27432" marB="27432" anchor="ctr">
+                    <a:solidFill>
+                      <a:srgbClr val="F3F8FB"/>
+                    </a:solidFill>
+                  </a:tcPr>
+                </a:tc>
+                <a:tc>
+                  <a:txBody>
+                    <a:bodyPr wrap="square"/>
+                    <a:lstStyle/>
+                    <a:p>
+                      <a:pPr algn="l"/>
+                      <a:r>
+                        <a:rPr sz="1050" b="0">
+                          <a:solidFill>
+                            <a:srgbClr val="243B53"/>
+                          </a:solidFill>
+                          <a:latin typeface="Segoe UI"/>
+                        </a:rPr>
+                        <a:t>No</a:t>
+                      </a:r>
+                    </a:p>
+                  </a:txBody>
+                  <a:tcPr marL="91440" marR="91440" marT="27432" marB="27432" anchor="ctr">
+                    <a:solidFill>
+                      <a:srgbClr val="F3F8FB"/>
+                    </a:solidFill>
+                  </a:tcPr>
+                </a:tc>
+              </a:tr>
+              <a:tr h="384048">
+                <a:tc>
+                  <a:txBody>
+                    <a:bodyPr wrap="square"/>
+                    <a:lstStyle/>
+                    <a:p>
+                      <a:pPr algn="l"/>
+                      <a:r>
+                        <a:rPr sz="1050" b="1">
+                          <a:solidFill>
+                            <a:srgbClr val="0B2B4A"/>
+                          </a:solidFill>
+                          <a:latin typeface="Segoe UI"/>
+                        </a:rPr>
+                        <a:t>Chowdhury et al. [7]</a:t>
+                      </a:r>
+                    </a:p>
+                  </a:txBody>
+                  <a:tcPr marL="91440" marR="91440" marT="27432" marB="27432" anchor="ctr">
+                    <a:solidFill>
+                      <a:srgbClr val="FFFFFF"/>
+                    </a:solidFill>
+                  </a:tcPr>
+                </a:tc>
+                <a:tc>
+                  <a:txBody>
+                    <a:bodyPr wrap="square"/>
+                    <a:lstStyle/>
+                    <a:p>
+                      <a:pPr algn="l"/>
+                      <a:r>
+                        <a:rPr sz="1050" b="0">
+                          <a:solidFill>
+                            <a:srgbClr val="243B53"/>
+                          </a:solidFill>
+                          <a:latin typeface="Segoe UI"/>
+                        </a:rPr>
+                        <a:t>Normal, viral, COVID-19</a:t>
+                      </a:r>
+                    </a:p>
+                  </a:txBody>
+                  <a:tcPr marL="91440" marR="91440" marT="27432" marB="27432" anchor="ctr">
+                    <a:solidFill>
+                      <a:srgbClr val="FFFFFF"/>
+                    </a:solidFill>
+                  </a:tcPr>
+                </a:tc>
+                <a:tc>
+                  <a:txBody>
+                    <a:bodyPr wrap="square"/>
+                    <a:lstStyle/>
+                    <a:p>
+                      <a:pPr algn="l"/>
+                      <a:r>
+                        <a:rPr sz="1050" b="0">
+                          <a:solidFill>
+                            <a:srgbClr val="243B53"/>
+                          </a:solidFill>
+                          <a:latin typeface="Segoe UI"/>
+                        </a:rPr>
+                        <a:t>Score-CAM, qualitative</a:t>
+                      </a:r>
+                    </a:p>
+                  </a:txBody>
+                  <a:tcPr marL="91440" marR="91440" marT="27432" marB="27432" anchor="ctr">
+                    <a:solidFill>
+                      <a:srgbClr val="FFFFFF"/>
+                    </a:solidFill>
+                  </a:tcPr>
+                </a:tc>
+                <a:tc>
+                  <a:txBody>
+                    <a:bodyPr wrap="square"/>
+                    <a:lstStyle/>
+                    <a:p>
+                      <a:pPr algn="l"/>
+                      <a:r>
+                        <a:rPr sz="1050" b="0">
+                          <a:solidFill>
+                            <a:srgbClr val="243B53"/>
+                          </a:solidFill>
+                          <a:latin typeface="Segoe UI"/>
+                        </a:rPr>
+                        <a:t>None reported</a:t>
+                      </a:r>
+                    </a:p>
+                  </a:txBody>
+                  <a:tcPr marL="91440" marR="91440" marT="27432" marB="27432" anchor="ctr">
+                    <a:solidFill>
+                      <a:srgbClr val="FFFFFF"/>
+                    </a:solidFill>
+                  </a:tcPr>
+                </a:tc>
+                <a:tc>
+                  <a:txBody>
+                    <a:bodyPr wrap="square"/>
+                    <a:lstStyle/>
+                    <a:p>
+                      <a:pPr algn="l"/>
+                      <a:r>
+                        <a:rPr sz="1050" b="0">
+                          <a:solidFill>
+                            <a:srgbClr val="243B53"/>
+                          </a:solidFill>
+                          <a:latin typeface="Segoe UI"/>
+                        </a:rPr>
+                        <a:t>No</a:t>
+                      </a:r>
+                    </a:p>
+                  </a:txBody>
+                  <a:tcPr marL="91440" marR="91440" marT="27432" marB="27432" anchor="ctr">
+                    <a:solidFill>
+                      <a:srgbClr val="FFFFFF"/>
+                    </a:solidFill>
+                  </a:tcPr>
+                </a:tc>
+              </a:tr>
+              <a:tr h="384048">
+                <a:tc>
+                  <a:txBody>
+                    <a:bodyPr wrap="square"/>
+                    <a:lstStyle/>
+                    <a:p>
+                      <a:pPr algn="l"/>
+                      <a:r>
+                        <a:rPr sz="1050" b="1">
+                          <a:solidFill>
+                            <a:srgbClr val="0B2B4A"/>
+                          </a:solidFill>
+                          <a:latin typeface="Segoe UI"/>
+                        </a:rPr>
+                        <a:t>Huang &amp; Liao [23]</a:t>
+                      </a:r>
+                    </a:p>
+                  </a:txBody>
+                  <a:tcPr marL="91440" marR="91440" marT="27432" marB="27432" anchor="ctr">
+                    <a:solidFill>
+                      <a:srgbClr val="F3F8FB"/>
+                    </a:solidFill>
+                  </a:tcPr>
+                </a:tc>
+                <a:tc>
+                  <a:txBody>
+                    <a:bodyPr wrap="square"/>
+                    <a:lstStyle/>
+                    <a:p>
+                      <a:pPr algn="l"/>
+                      <a:r>
+                        <a:rPr sz="1050" b="0">
+                          <a:solidFill>
+                            <a:srgbClr val="243B53"/>
+                          </a:solidFill>
+                          <a:latin typeface="Segoe UI"/>
+                        </a:rPr>
+                        <a:t>Multi class chest disease</a:t>
+                      </a:r>
+                    </a:p>
+                  </a:txBody>
+                  <a:tcPr marL="91440" marR="91440" marT="27432" marB="27432" anchor="ctr">
+                    <a:solidFill>
+                      <a:srgbClr val="F3F8FB"/>
+                    </a:solidFill>
+                  </a:tcPr>
+                </a:tc>
+                <a:tc>
+                  <a:txBody>
+                    <a:bodyPr wrap="square"/>
+                    <a:lstStyle/>
+                    <a:p>
+                      <a:pPr algn="l"/>
+                      <a:r>
+                        <a:rPr sz="1050" b="0">
+                          <a:solidFill>
+                            <a:srgbClr val="243B53"/>
+                          </a:solidFill>
+                          <a:latin typeface="Segoe UI"/>
+                        </a:rPr>
+                        <a:t>Limited</a:t>
+                      </a:r>
+                    </a:p>
+                  </a:txBody>
+                  <a:tcPr marL="91440" marR="91440" marT="27432" marB="27432" anchor="ctr">
+                    <a:solidFill>
+                      <a:srgbClr val="F3F8FB"/>
+                    </a:solidFill>
+                  </a:tcPr>
+                </a:tc>
+                <a:tc>
+                  <a:txBody>
+                    <a:bodyPr wrap="square"/>
+                    <a:lstStyle/>
+                    <a:p>
+                      <a:pPr algn="l"/>
+                      <a:r>
+                        <a:rPr sz="1050" b="0">
+                          <a:solidFill>
+                            <a:srgbClr val="243B53"/>
+                          </a:solidFill>
+                          <a:latin typeface="Segoe UI"/>
+                        </a:rPr>
+                        <a:t>None reported</a:t>
+                      </a:r>
+                    </a:p>
+                  </a:txBody>
+                  <a:tcPr marL="91440" marR="91440" marT="27432" marB="27432" anchor="ctr">
+                    <a:solidFill>
+                      <a:srgbClr val="F3F8FB"/>
+                    </a:solidFill>
+                  </a:tcPr>
+                </a:tc>
+                <a:tc>
+                  <a:txBody>
+                    <a:bodyPr wrap="square"/>
+                    <a:lstStyle/>
+                    <a:p>
+                      <a:pPr algn="l"/>
+                      <a:r>
+                        <a:rPr sz="1050" b="0">
+                          <a:solidFill>
+                            <a:srgbClr val="243B53"/>
+                          </a:solidFill>
+                          <a:latin typeface="Segoe UI"/>
+                        </a:rPr>
+                        <a:t>No</a:t>
+                      </a:r>
+                    </a:p>
+                  </a:txBody>
+                  <a:tcPr marL="91440" marR="91440" marT="27432" marB="27432" anchor="ctr">
+                    <a:solidFill>
+                      <a:srgbClr val="F3F8FB"/>
+                    </a:solidFill>
+                  </a:tcPr>
+                </a:tc>
+              </a:tr>
+              <a:tr h="384048">
+                <a:tc>
+                  <a:txBody>
+                    <a:bodyPr wrap="square"/>
+                    <a:lstStyle/>
+                    <a:p>
+                      <a:pPr algn="l"/>
+                      <a:r>
+                        <a:rPr sz="1050" b="1">
+                          <a:solidFill>
+                            <a:srgbClr val="0B2B4A"/>
+                          </a:solidFill>
+                          <a:latin typeface="Segoe UI"/>
+                        </a:rPr>
+                        <a:t>This study</a:t>
+                      </a:r>
+                    </a:p>
+                  </a:txBody>
+                  <a:tcPr marL="91440" marR="91440" marT="27432" marB="27432" anchor="ctr">
+                    <a:solidFill>
+                      <a:srgbClr val="E6F2F7"/>
+                    </a:solidFill>
+                  </a:tcPr>
+                </a:tc>
+                <a:tc>
+                  <a:txBody>
+                    <a:bodyPr wrap="square"/>
+                    <a:lstStyle/>
+                    <a:p>
+                      <a:pPr algn="l"/>
+                      <a:r>
+                        <a:rPr sz="1050" b="1">
+                          <a:solidFill>
+                            <a:srgbClr val="0B2B4A"/>
+                          </a:solidFill>
+                          <a:latin typeface="Segoe UI"/>
+                        </a:rPr>
+                        <a:t>Four class, bacterial vs viral</a:t>
+                      </a:r>
+                    </a:p>
+                  </a:txBody>
+                  <a:tcPr marL="91440" marR="91440" marT="27432" marB="27432" anchor="ctr">
+                    <a:solidFill>
+                      <a:srgbClr val="E6F2F7"/>
+                    </a:solidFill>
+                  </a:tcPr>
+                </a:tc>
+                <a:tc>
+                  <a:txBody>
+                    <a:bodyPr wrap="square"/>
+                    <a:lstStyle/>
+                    <a:p>
+                      <a:pPr algn="l"/>
+                      <a:r>
+                        <a:rPr sz="1050" b="1">
+                          <a:solidFill>
+                            <a:srgbClr val="0B2B4A"/>
+                          </a:solidFill>
+                          <a:latin typeface="Segoe UI"/>
+                        </a:rPr>
+                        <a:t>Grad-CAM from logits, lung restricted, quantified</a:t>
+                      </a:r>
+                    </a:p>
+                  </a:txBody>
+                  <a:tcPr marL="91440" marR="91440" marT="27432" marB="27432" anchor="ctr">
+                    <a:solidFill>
+                      <a:srgbClr val="E6F2F7"/>
+                    </a:solidFill>
+                  </a:tcPr>
+                </a:tc>
+                <a:tc>
+                  <a:txBody>
+                    <a:bodyPr wrap="square"/>
+                    <a:lstStyle/>
+                    <a:p>
+                      <a:pPr algn="l"/>
+                      <a:r>
+                        <a:rPr sz="1050" b="1">
+                          <a:solidFill>
+                            <a:srgbClr val="0B2B4A"/>
+                          </a:solidFill>
+                          <a:latin typeface="Segoe UI"/>
+                        </a:rPr>
+                        <a:t>Mahalanobis, energy and MSP, evaluated</a:t>
+                      </a:r>
+                    </a:p>
+                  </a:txBody>
+                  <a:tcPr marL="91440" marR="91440" marT="27432" marB="27432" anchor="ctr">
+                    <a:solidFill>
+                      <a:srgbClr val="E6F2F7"/>
+                    </a:solidFill>
+                  </a:tcPr>
+                </a:tc>
+                <a:tc>
+                  <a:txBody>
+                    <a:bodyPr wrap="square"/>
+                    <a:lstStyle/>
+                    <a:p>
+                      <a:pPr algn="l"/>
+                      <a:r>
+                        <a:rPr sz="1050" b="1">
+                          <a:solidFill>
+                            <a:srgbClr val="0B2B4A"/>
+                          </a:solidFill>
+                          <a:latin typeface="Segoe UI"/>
+                        </a:rPr>
+                        <a:t>Yes, full platform</a:t>
+                      </a:r>
+                    </a:p>
+                  </a:txBody>
+                  <a:tcPr marL="91440" marR="91440" marT="27432" marB="27432" anchor="ctr">
+                    <a:solidFill>
+                      <a:srgbClr val="E6F2F7"/>
+                    </a:solidFill>
+                  </a:tcPr>
+                </a:tc>
+              </a:tr>
+            </a:tbl>
+          </a:graphicData>
+        </a:graphic>
+      </p:graphicFrame>
+      <p:sp>
+        <p:nvSpPr>
+          <p:cNvPr id="9" name="TextBox 8"/>
+          <p:cNvSpPr txBox="1"/>
+          <p:nvPr/>
+        </p:nvSpPr>
+        <p:spPr>
+          <a:xfrm>
+            <a:off x="658368" y="5138928"/>
+            <a:ext cx="10874959" cy="274320"/>
+          </a:xfrm>
+          <a:prstGeom prst="rect">
+            <a:avLst/>
+          </a:prstGeom>
+          <a:noFill/>
+        </p:spPr>
+        <p:txBody>
+          <a:bodyPr wrap="square" anchor="t" lIns="0" rIns="0" tIns="0" bIns="0">
+            <a:spAutoFit/>
+          </a:bodyPr>
+          <a:lstStyle/>
+          <a:p>
+            <a:pPr algn="l">
+              <a:lnSpc>
+                <a:spcPct val="118000"/>
+              </a:lnSpc>
+              <a:spcAft>
+                <a:spcPts val="600"/>
+              </a:spcAft>
+            </a:pPr>
+            <a:r>
+              <a:rPr sz="1300" b="1" i="0">
+                <a:solidFill>
+                  <a:srgbClr val="0B2B4A"/>
+                </a:solidFill>
+                <a:latin typeface="Segoe UI"/>
+              </a:rPr>
+              <a:t>Three derived requirements separate this design from every row above</a:t>
+            </a:r>
+          </a:p>
+        </p:txBody>
+      </p:sp>
+      <p:sp>
+        <p:nvSpPr>
+          <p:cNvPr id="10" name="Rounded Rectangle 9"/>
+          <p:cNvSpPr/>
+          <p:nvPr/>
+        </p:nvSpPr>
+        <p:spPr>
+          <a:xfrm>
+            <a:off x="658368" y="5504688"/>
+            <a:ext cx="3478682" cy="658368"/>
+          </a:xfrm>
+          <a:prstGeom prst="roundRect">
+            <a:avLst>
+              <a:gd name="adj" fmla="val 10000"/>
+            </a:avLst>
+          </a:prstGeom>
+          <a:solidFill>
+            <a:srgbClr val="E6F2F7"/>
+          </a:solidFill>
+          <a:ln>
+            <a:noFill/>
+          </a:ln>
+          <a:effectLst/>
+        </p:spPr>
+        <p:style>
+          <a:lnRef idx="1">
+            <a:schemeClr val="accent1"/>
+          </a:lnRef>
+          <a:fillRef idx="3">
+            <a:schemeClr val="accent1"/>
+          </a:fillRef>
+          <a:effectRef idx="2">
+            <a:schemeClr val="accent1"/>
+          </a:effectRef>
+          <a:fontRef idx="minor">
+            <a:schemeClr val="lt1"/>
+          </a:fontRef>
+        </p:style>
+        <p:txBody>
+          <a:bodyPr rtlCol="0" anchor="ctr"/>
+          <a:lstStyle/>
+          <a:p/>
+        </p:txBody>
+      </p:sp>
+      <p:sp>
+        <p:nvSpPr>
+          <p:cNvPr id="11" name="TextBox 10"/>
+          <p:cNvSpPr txBox="1"/>
+          <p:nvPr/>
+        </p:nvSpPr>
+        <p:spPr>
+          <a:xfrm>
+            <a:off x="841248" y="5596128"/>
+            <a:ext cx="3112922" cy="502920"/>
+          </a:xfrm>
+          <a:prstGeom prst="rect">
+            <a:avLst/>
+          </a:prstGeom>
+          <a:noFill/>
+        </p:spPr>
+        <p:txBody>
+          <a:bodyPr wrap="square" anchor="t" lIns="0" rIns="0" tIns="0" bIns="0">
+            <a:spAutoFit/>
+          </a:bodyPr>
+          <a:lstStyle/>
+          <a:p>
+            <a:pPr algn="l">
+              <a:lnSpc>
+                <a:spcPct val="118000"/>
+              </a:lnSpc>
+              <a:spcAft>
+                <a:spcPts val="600"/>
+              </a:spcAft>
+            </a:pPr>
+            <a:r>
+              <a:rPr sz="1200" b="1" i="0">
+                <a:solidFill>
+                  <a:srgbClr val="0E5A72"/>
+                </a:solidFill>
+                <a:latin typeface="Segoe UI"/>
+              </a:rPr>
+              <a:t>DR4  </a:t>
+            </a:r>
+            <a:r>
+              <a:rPr sz="1150" b="0" i="0">
+                <a:solidFill>
+                  <a:srgbClr val="243B53"/>
+                </a:solidFill>
+                <a:latin typeface="Segoe UI"/>
+              </a:rPr>
+              <a:t>the system must be able to refuse to answer</a:t>
+            </a:r>
+          </a:p>
+        </p:txBody>
+      </p:sp>
+      <p:sp>
+        <p:nvSpPr>
+          <p:cNvPr id="12" name="Rounded Rectangle 11"/>
+          <p:cNvSpPr/>
+          <p:nvPr/>
+        </p:nvSpPr>
+        <p:spPr>
+          <a:xfrm>
+            <a:off x="4356506" y="5504688"/>
+            <a:ext cx="3478682" cy="658368"/>
+          </a:xfrm>
+          <a:prstGeom prst="roundRect">
+            <a:avLst>
+              <a:gd name="adj" fmla="val 10000"/>
+            </a:avLst>
+          </a:prstGeom>
+          <a:solidFill>
+            <a:srgbClr val="E6F2F7"/>
+          </a:solidFill>
+          <a:ln>
+            <a:noFill/>
+          </a:ln>
+          <a:effectLst/>
+        </p:spPr>
+        <p:style>
+          <a:lnRef idx="1">
+            <a:schemeClr val="accent1"/>
+          </a:lnRef>
+          <a:fillRef idx="3">
+            <a:schemeClr val="accent1"/>
+          </a:fillRef>
+          <a:effectRef idx="2">
+            <a:schemeClr val="accent1"/>
+          </a:effectRef>
+          <a:fontRef idx="minor">
+            <a:schemeClr val="lt1"/>
+          </a:fontRef>
+        </p:style>
+        <p:txBody>
+          <a:bodyPr rtlCol="0" anchor="ctr"/>
+          <a:lstStyle/>
+          <a:p/>
+        </p:txBody>
+      </p:sp>
+      <p:sp>
+        <p:nvSpPr>
+          <p:cNvPr id="13" name="TextBox 12"/>
+          <p:cNvSpPr txBox="1"/>
+          <p:nvPr/>
+        </p:nvSpPr>
+        <p:spPr>
+          <a:xfrm>
+            <a:off x="4539386" y="5596128"/>
+            <a:ext cx="3112922" cy="502920"/>
+          </a:xfrm>
+          <a:prstGeom prst="rect">
+            <a:avLst/>
+          </a:prstGeom>
+          <a:noFill/>
+        </p:spPr>
+        <p:txBody>
+          <a:bodyPr wrap="square" anchor="t" lIns="0" rIns="0" tIns="0" bIns="0">
+            <a:spAutoFit/>
+          </a:bodyPr>
+          <a:lstStyle/>
+          <a:p>
+            <a:pPr algn="l">
+              <a:lnSpc>
+                <a:spcPct val="118000"/>
+              </a:lnSpc>
+              <a:spcAft>
+                <a:spcPts val="600"/>
+              </a:spcAft>
+            </a:pPr>
+            <a:r>
+              <a:rPr sz="1200" b="1" i="0">
+                <a:solidFill>
+                  <a:srgbClr val="0E5A72"/>
+                </a:solidFill>
+                <a:latin typeface="Segoe UI"/>
+              </a:rPr>
+              <a:t>DR5  </a:t>
+            </a:r>
+            <a:r>
+              <a:rPr sz="1150" b="0" i="0">
+                <a:solidFill>
+                  <a:srgbClr val="243B53"/>
+                </a:solidFill>
+                <a:latin typeface="Segoe UI"/>
+              </a:rPr>
+              <a:t>several validity signals compared, not one adopted</a:t>
+            </a:r>
+          </a:p>
+        </p:txBody>
+      </p:sp>
+      <p:sp>
+        <p:nvSpPr>
+          <p:cNvPr id="14" name="Rounded Rectangle 13"/>
+          <p:cNvSpPr/>
+          <p:nvPr/>
+        </p:nvSpPr>
+        <p:spPr>
+          <a:xfrm>
+            <a:off x="8054644" y="5504688"/>
+            <a:ext cx="3478682" cy="658368"/>
+          </a:xfrm>
+          <a:prstGeom prst="roundRect">
+            <a:avLst>
+              <a:gd name="adj" fmla="val 10000"/>
+            </a:avLst>
+          </a:prstGeom>
+          <a:solidFill>
+            <a:srgbClr val="E6F2F7"/>
+          </a:solidFill>
+          <a:ln>
+            <a:noFill/>
+          </a:ln>
+          <a:effectLst/>
+        </p:spPr>
+        <p:style>
+          <a:lnRef idx="1">
+            <a:schemeClr val="accent1"/>
+          </a:lnRef>
+          <a:fillRef idx="3">
+            <a:schemeClr val="accent1"/>
+          </a:fillRef>
+          <a:effectRef idx="2">
+            <a:schemeClr val="accent1"/>
+          </a:effectRef>
+          <a:fontRef idx="minor">
+            <a:schemeClr val="lt1"/>
+          </a:fontRef>
+        </p:style>
+        <p:txBody>
+          <a:bodyPr rtlCol="0" anchor="ctr"/>
+          <a:lstStyle/>
+          <a:p/>
+        </p:txBody>
+      </p:sp>
+      <p:sp>
+        <p:nvSpPr>
+          <p:cNvPr id="15" name="TextBox 14"/>
+          <p:cNvSpPr txBox="1"/>
+          <p:nvPr/>
+        </p:nvSpPr>
+        <p:spPr>
+          <a:xfrm>
+            <a:off x="8237524" y="5596128"/>
+            <a:ext cx="3112922" cy="502920"/>
+          </a:xfrm>
+          <a:prstGeom prst="rect">
+            <a:avLst/>
+          </a:prstGeom>
+          <a:noFill/>
+        </p:spPr>
+        <p:txBody>
+          <a:bodyPr wrap="square" anchor="t" lIns="0" rIns="0" tIns="0" bIns="0">
+            <a:spAutoFit/>
+          </a:bodyPr>
+          <a:lstStyle/>
+          <a:p>
+            <a:pPr algn="l">
+              <a:lnSpc>
+                <a:spcPct val="118000"/>
+              </a:lnSpc>
+              <a:spcAft>
+                <a:spcPts val="600"/>
+              </a:spcAft>
+            </a:pPr>
+            <a:r>
+              <a:rPr sz="1200" b="1" i="0">
+                <a:solidFill>
+                  <a:srgbClr val="0E5A72"/>
+                </a:solidFill>
+                <a:latin typeface="Segoe UI"/>
+              </a:rPr>
+              <a:t>DR8  </a:t>
+            </a:r>
+            <a:r>
+              <a:rPr sz="1150" b="0" i="0">
+                <a:solidFill>
+                  <a:srgbClr val="243B53"/>
+                </a:solidFill>
+                <a:latin typeface="Segoe UI"/>
+              </a:rPr>
+              <a:t>explanation localisation measured and disclosed</a:t>
+            </a:r>
+          </a:p>
+        </p:txBody>
+      </p:sp>
+    </p:spTree>
+  </p:cSld>
+  <p:clrMapOvr>
+    <a:masterClrMapping/>
+  </p:clrMapOvr>
+</p:sld>
+</file>
+
 <file path=ppt/slides/slide7.xml><?xml version="1.0" encoding="utf-8"?>
 <p:sld xmlns:a="http://schemas.openxmlformats.org/drawingml/2006/main" xmlns:p="http://schemas.openxmlformats.org/presentationml/2006/main" xmlns:r="http://schemas.openxmlformats.org/officeDocument/2006/relationships">
   <p:cSld>
@@ -19156,6 +21032,1363 @@
                 <a:latin typeface="Segoe UI"/>
               </a:rPr>
               <a:t>Do the Grad-CAM explanations fall on the lung fields and on the regions clinically associated with each class?</a:t>
+            </a:r>
+          </a:p>
+        </p:txBody>
+      </p:sp>
+    </p:spTree>
+  </p:cSld>
+  <p:clrMapOvr>
+    <a:masterClrMapping/>
+  </p:clrMapOvr>
+</p:sld>
+</file>
+
+<file path=ppt/slides/slide8.xml><?xml version="1.0" encoding="utf-8"?>
+<p:sld xmlns:a="http://schemas.openxmlformats.org/drawingml/2006/main" xmlns:p="http://schemas.openxmlformats.org/presentationml/2006/main" xmlns:r="http://schemas.openxmlformats.org/officeDocument/2006/relationships">
+  <p:cSld>
+    <p:spTree>
+      <p:nvGrpSpPr>
+        <p:cNvPr id="1" name=""/>
+        <p:cNvGrpSpPr/>
+        <p:nvPr/>
+      </p:nvGrpSpPr>
+      <p:grpSpPr/>
+      <p:sp>
+        <p:nvSpPr>
+          <p:cNvPr id="2" name="TextBox 1"/>
+          <p:cNvSpPr txBox="1"/>
+          <p:nvPr/>
+        </p:nvSpPr>
+        <p:spPr>
+          <a:xfrm>
+            <a:off x="658368" y="566928"/>
+            <a:ext cx="10874959" cy="237744"/>
+          </a:xfrm>
+          <a:prstGeom prst="rect">
+            <a:avLst/>
+          </a:prstGeom>
+          <a:noFill/>
+        </p:spPr>
+        <p:txBody>
+          <a:bodyPr wrap="square" anchor="t" lIns="0" rIns="0" tIns="0" bIns="0">
+            <a:spAutoFit/>
+          </a:bodyPr>
+          <a:lstStyle/>
+          <a:p>
+            <a:pPr algn="l">
+              <a:lnSpc>
+                <a:spcPct val="118000"/>
+              </a:lnSpc>
+              <a:spcAft>
+                <a:spcPts val="600"/>
+              </a:spcAft>
+            </a:pPr>
+            <a:r>
+              <a:rPr sz="1050" b="1" i="0">
+                <a:solidFill>
+                  <a:srgbClr val="147D9B"/>
+                </a:solidFill>
+                <a:latin typeface="Segoe UI"/>
+              </a:rPr>
+              <a:t>WHAT THE STUDY SET OUT TO DO</a:t>
+            </a:r>
+          </a:p>
+        </p:txBody>
+      </p:sp>
+      <p:sp>
+        <p:nvSpPr>
+          <p:cNvPr id="3" name="TextBox 2"/>
+          <p:cNvSpPr txBox="1"/>
+          <p:nvPr/>
+        </p:nvSpPr>
+        <p:spPr>
+          <a:xfrm>
+            <a:off x="658368" y="877824"/>
+            <a:ext cx="10874959" cy="566928"/>
+          </a:xfrm>
+          <a:prstGeom prst="rect">
+            <a:avLst/>
+          </a:prstGeom>
+          <a:noFill/>
+        </p:spPr>
+        <p:txBody>
+          <a:bodyPr wrap="none" anchor="t" lIns="0" rIns="0" tIns="0" bIns="0">
+            <a:spAutoFit/>
+          </a:bodyPr>
+          <a:lstStyle/>
+          <a:p>
+            <a:pPr algn="l">
+              <a:lnSpc>
+                <a:spcPct val="102000"/>
+              </a:lnSpc>
+              <a:spcAft>
+                <a:spcPts val="600"/>
+              </a:spcAft>
+            </a:pPr>
+            <a:r>
+              <a:rPr sz="2700" b="1" i="0">
+                <a:solidFill>
+                  <a:srgbClr val="0B2B4A"/>
+                </a:solidFill>
+                <a:latin typeface="Segoe UI"/>
+              </a:rPr>
+              <a:t>Aim and objectives</a:t>
+            </a:r>
+          </a:p>
+        </p:txBody>
+      </p:sp>
+      <p:sp>
+        <p:nvSpPr>
+          <p:cNvPr id="4" name="Rectangle 3"/>
+          <p:cNvSpPr/>
+          <p:nvPr/>
+        </p:nvSpPr>
+        <p:spPr>
+          <a:xfrm>
+            <a:off x="658368" y="1499616"/>
+            <a:ext cx="1051560" cy="33020"/>
+          </a:xfrm>
+          <a:prstGeom prst="rect">
+            <a:avLst/>
+          </a:prstGeom>
+          <a:solidFill>
+            <a:srgbClr val="147D9B"/>
+          </a:solidFill>
+          <a:ln>
+            <a:noFill/>
+          </a:ln>
+          <a:effectLst/>
+        </p:spPr>
+        <p:style>
+          <a:lnRef idx="1">
+            <a:schemeClr val="accent1"/>
+          </a:lnRef>
+          <a:fillRef idx="3">
+            <a:schemeClr val="accent1"/>
+          </a:fillRef>
+          <a:effectRef idx="2">
+            <a:schemeClr val="accent1"/>
+          </a:effectRef>
+          <a:fontRef idx="minor">
+            <a:schemeClr val="lt1"/>
+          </a:fontRef>
+        </p:style>
+        <p:txBody>
+          <a:bodyPr rtlCol="0" anchor="ctr"/>
+          <a:lstStyle/>
+          <a:p/>
+        </p:txBody>
+      </p:sp>
+      <p:sp>
+        <p:nvSpPr>
+          <p:cNvPr id="5" name="Rectangle 4"/>
+          <p:cNvSpPr/>
+          <p:nvPr/>
+        </p:nvSpPr>
+        <p:spPr>
+          <a:xfrm>
+            <a:off x="658368" y="6382512"/>
+            <a:ext cx="10874959" cy="11430"/>
+          </a:xfrm>
+          <a:prstGeom prst="rect">
+            <a:avLst/>
+          </a:prstGeom>
+          <a:solidFill>
+            <a:srgbClr val="D8E5EE"/>
+          </a:solidFill>
+          <a:ln>
+            <a:noFill/>
+          </a:ln>
+          <a:effectLst/>
+        </p:spPr>
+        <p:style>
+          <a:lnRef idx="1">
+            <a:schemeClr val="accent1"/>
+          </a:lnRef>
+          <a:fillRef idx="3">
+            <a:schemeClr val="accent1"/>
+          </a:fillRef>
+          <a:effectRef idx="2">
+            <a:schemeClr val="accent1"/>
+          </a:effectRef>
+          <a:fontRef idx="minor">
+            <a:schemeClr val="lt1"/>
+          </a:fontRef>
+        </p:style>
+        <p:txBody>
+          <a:bodyPr rtlCol="0" anchor="ctr"/>
+          <a:lstStyle/>
+          <a:p/>
+        </p:txBody>
+      </p:sp>
+      <p:sp>
+        <p:nvSpPr>
+          <p:cNvPr id="6" name="TextBox 5"/>
+          <p:cNvSpPr txBox="1"/>
+          <p:nvPr/>
+        </p:nvSpPr>
+        <p:spPr>
+          <a:xfrm>
+            <a:off x="658368" y="6473952"/>
+            <a:ext cx="7315200" cy="256032"/>
+          </a:xfrm>
+          <a:prstGeom prst="rect">
+            <a:avLst/>
+          </a:prstGeom>
+          <a:noFill/>
+        </p:spPr>
+        <p:txBody>
+          <a:bodyPr wrap="square" anchor="t" lIns="0" rIns="0" tIns="0" bIns="0">
+            <a:spAutoFit/>
+          </a:bodyPr>
+          <a:lstStyle/>
+          <a:p>
+            <a:pPr algn="l">
+              <a:lnSpc>
+                <a:spcPct val="118000"/>
+              </a:lnSpc>
+              <a:spcAft>
+                <a:spcPts val="600"/>
+              </a:spcAft>
+            </a:pPr>
+            <a:r>
+              <a:rPr sz="900" b="0" i="0">
+                <a:solidFill>
+                  <a:srgbClr val="647C93"/>
+                </a:solidFill>
+                <a:latin typeface="Segoe UI"/>
+              </a:rPr>
+              <a:t>LungVision AI  ·  G. C. M. Sewwandi  ·  29002</a:t>
+            </a:r>
+          </a:p>
+        </p:txBody>
+      </p:sp>
+      <p:sp>
+        <p:nvSpPr>
+          <p:cNvPr id="7" name="TextBox 6"/>
+          <p:cNvSpPr txBox="1"/>
+          <p:nvPr/>
+        </p:nvSpPr>
+        <p:spPr>
+          <a:xfrm>
+            <a:off x="10436047" y="6473952"/>
+            <a:ext cx="1097280" cy="256032"/>
+          </a:xfrm>
+          <a:prstGeom prst="rect">
+            <a:avLst/>
+          </a:prstGeom>
+          <a:noFill/>
+        </p:spPr>
+        <p:txBody>
+          <a:bodyPr wrap="square" anchor="t" lIns="0" rIns="0" tIns="0" bIns="0">
+            <a:spAutoFit/>
+          </a:bodyPr>
+          <a:lstStyle/>
+          <a:p>
+            <a:pPr algn="r">
+              <a:lnSpc>
+                <a:spcPct val="118000"/>
+              </a:lnSpc>
+              <a:spcAft>
+                <a:spcPts val="600"/>
+              </a:spcAft>
+            </a:pPr>
+            <a:r>
+              <a:rPr sz="900" b="0" i="0">
+                <a:solidFill>
+                  <a:srgbClr val="647C93"/>
+                </a:solidFill>
+                <a:latin typeface="Segoe UI"/>
+              </a:rPr>
+              <a:t>4</a:t>
+            </a:r>
+          </a:p>
+        </p:txBody>
+      </p:sp>
+      <p:sp>
+        <p:nvSpPr>
+          <p:cNvPr id="8" name="Rounded Rectangle 7"/>
+          <p:cNvSpPr/>
+          <p:nvPr/>
+        </p:nvSpPr>
+        <p:spPr>
+          <a:xfrm>
+            <a:off x="658368" y="1572768"/>
+            <a:ext cx="10874959" cy="1389888"/>
+          </a:xfrm>
+          <a:prstGeom prst="roundRect">
+            <a:avLst>
+              <a:gd name="adj" fmla="val 6000"/>
+            </a:avLst>
+          </a:prstGeom>
+          <a:solidFill>
+            <a:srgbClr val="F3F8FB"/>
+          </a:solidFill>
+          <a:ln w="12700">
+            <a:solidFill>
+              <a:srgbClr val="D8E5EE"/>
+            </a:solidFill>
+          </a:ln>
+          <a:effectLst/>
+        </p:spPr>
+        <p:style>
+          <a:lnRef idx="1">
+            <a:schemeClr val="accent1"/>
+          </a:lnRef>
+          <a:fillRef idx="3">
+            <a:schemeClr val="accent1"/>
+          </a:fillRef>
+          <a:effectRef idx="2">
+            <a:schemeClr val="accent1"/>
+          </a:effectRef>
+          <a:fontRef idx="minor">
+            <a:schemeClr val="lt1"/>
+          </a:fontRef>
+        </p:style>
+        <p:txBody>
+          <a:bodyPr rtlCol="0" anchor="ctr"/>
+          <a:lstStyle/>
+          <a:p/>
+        </p:txBody>
+      </p:sp>
+      <p:sp>
+        <p:nvSpPr>
+          <p:cNvPr id="9" name="Rectangle 8"/>
+          <p:cNvSpPr/>
+          <p:nvPr/>
+        </p:nvSpPr>
+        <p:spPr>
+          <a:xfrm>
+            <a:off x="658368" y="1572768"/>
+            <a:ext cx="40640" cy="1389888"/>
+          </a:xfrm>
+          <a:prstGeom prst="rect">
+            <a:avLst/>
+          </a:prstGeom>
+          <a:solidFill>
+            <a:srgbClr val="147D9B"/>
+          </a:solidFill>
+          <a:ln>
+            <a:noFill/>
+          </a:ln>
+          <a:effectLst/>
+        </p:spPr>
+        <p:style>
+          <a:lnRef idx="1">
+            <a:schemeClr val="accent1"/>
+          </a:lnRef>
+          <a:fillRef idx="3">
+            <a:schemeClr val="accent1"/>
+          </a:fillRef>
+          <a:effectRef idx="2">
+            <a:schemeClr val="accent1"/>
+          </a:effectRef>
+          <a:fontRef idx="minor">
+            <a:schemeClr val="lt1"/>
+          </a:fontRef>
+        </p:style>
+        <p:txBody>
+          <a:bodyPr rtlCol="0" anchor="ctr"/>
+          <a:lstStyle/>
+          <a:p/>
+        </p:txBody>
+      </p:sp>
+      <p:sp>
+        <p:nvSpPr>
+          <p:cNvPr id="10" name="TextBox 9"/>
+          <p:cNvSpPr txBox="1"/>
+          <p:nvPr/>
+        </p:nvSpPr>
+        <p:spPr>
+          <a:xfrm>
+            <a:off x="914400" y="1755648"/>
+            <a:ext cx="10362895" cy="274320"/>
+          </a:xfrm>
+          <a:prstGeom prst="rect">
+            <a:avLst/>
+          </a:prstGeom>
+          <a:noFill/>
+        </p:spPr>
+        <p:txBody>
+          <a:bodyPr wrap="square" anchor="t" lIns="0" rIns="0" tIns="0" bIns="0">
+            <a:spAutoFit/>
+          </a:bodyPr>
+          <a:lstStyle/>
+          <a:p>
+            <a:pPr algn="l">
+              <a:lnSpc>
+                <a:spcPct val="118000"/>
+              </a:lnSpc>
+              <a:spcAft>
+                <a:spcPts val="600"/>
+              </a:spcAft>
+            </a:pPr>
+            <a:r>
+              <a:rPr sz="1300" b="1" i="0">
+                <a:solidFill>
+                  <a:srgbClr val="0B2B4A"/>
+                </a:solidFill>
+                <a:latin typeface="Segoe UI"/>
+              </a:rPr>
+              <a:t>Aim</a:t>
+            </a:r>
+          </a:p>
+        </p:txBody>
+      </p:sp>
+      <p:sp>
+        <p:nvSpPr>
+          <p:cNvPr id="11" name="TextBox 10"/>
+          <p:cNvSpPr txBox="1"/>
+          <p:nvPr/>
+        </p:nvSpPr>
+        <p:spPr>
+          <a:xfrm>
+            <a:off x="914400" y="2121408"/>
+            <a:ext cx="10362895" cy="640080"/>
+          </a:xfrm>
+          <a:prstGeom prst="rect">
+            <a:avLst/>
+          </a:prstGeom>
+          <a:noFill/>
+        </p:spPr>
+        <p:txBody>
+          <a:bodyPr wrap="square" anchor="t" lIns="0" rIns="0" tIns="0" bIns="0">
+            <a:spAutoFit/>
+          </a:bodyPr>
+          <a:lstStyle/>
+          <a:p>
+            <a:pPr algn="l">
+              <a:lnSpc>
+                <a:spcPct val="118000"/>
+              </a:lnSpc>
+              <a:spcAft>
+                <a:spcPts val="600"/>
+              </a:spcAft>
+            </a:pPr>
+            <a:r>
+              <a:rPr sz="1300" b="0" i="0">
+                <a:solidFill>
+                  <a:srgbClr val="243B53"/>
+                </a:solidFill>
+                <a:latin typeface="Segoe UI"/>
+              </a:rPr>
+              <a:t>To design, implement and evaluate an explainable four class framework that is aware of out of distribution inputs, to deliver it as a working clinical decision support platform, and to produce evidence about its performance, its input validity behaviour and where its explanations place their attention.</a:t>
+            </a:r>
+          </a:p>
+        </p:txBody>
+      </p:sp>
+      <p:sp>
+        <p:nvSpPr>
+          <p:cNvPr id="12" name="Rounded Rectangle 11"/>
+          <p:cNvSpPr/>
+          <p:nvPr/>
+        </p:nvSpPr>
+        <p:spPr>
+          <a:xfrm>
+            <a:off x="658368" y="3127248"/>
+            <a:ext cx="10874959" cy="548640"/>
+          </a:xfrm>
+          <a:prstGeom prst="roundRect">
+            <a:avLst>
+              <a:gd name="adj" fmla="val 10000"/>
+            </a:avLst>
+          </a:prstGeom>
+          <a:solidFill>
+            <a:srgbClr val="F3F8FB"/>
+          </a:solidFill>
+          <a:ln w="12700">
+            <a:solidFill>
+              <a:srgbClr val="D8E5EE"/>
+            </a:solidFill>
+          </a:ln>
+          <a:effectLst/>
+        </p:spPr>
+        <p:style>
+          <a:lnRef idx="1">
+            <a:schemeClr val="accent1"/>
+          </a:lnRef>
+          <a:fillRef idx="3">
+            <a:schemeClr val="accent1"/>
+          </a:fillRef>
+          <a:effectRef idx="2">
+            <a:schemeClr val="accent1"/>
+          </a:effectRef>
+          <a:fontRef idx="minor">
+            <a:schemeClr val="lt1"/>
+          </a:fontRef>
+        </p:style>
+        <p:txBody>
+          <a:bodyPr rtlCol="0" anchor="ctr"/>
+          <a:lstStyle/>
+          <a:p/>
+        </p:txBody>
+      </p:sp>
+      <p:sp>
+        <p:nvSpPr>
+          <p:cNvPr id="13" name="Rounded Rectangle 12"/>
+          <p:cNvSpPr/>
+          <p:nvPr/>
+        </p:nvSpPr>
+        <p:spPr>
+          <a:xfrm>
+            <a:off x="658368" y="3127248"/>
+            <a:ext cx="786384" cy="548640"/>
+          </a:xfrm>
+          <a:prstGeom prst="roundRect">
+            <a:avLst>
+              <a:gd name="adj" fmla="val 10000"/>
+            </a:avLst>
+          </a:prstGeom>
+          <a:solidFill>
+            <a:srgbClr val="0E5A72"/>
+          </a:solidFill>
+          <a:ln>
+            <a:noFill/>
+          </a:ln>
+          <a:effectLst/>
+        </p:spPr>
+        <p:style>
+          <a:lnRef idx="1">
+            <a:schemeClr val="accent1"/>
+          </a:lnRef>
+          <a:fillRef idx="3">
+            <a:schemeClr val="accent1"/>
+          </a:fillRef>
+          <a:effectRef idx="2">
+            <a:schemeClr val="accent1"/>
+          </a:effectRef>
+          <a:fontRef idx="minor">
+            <a:schemeClr val="lt1"/>
+          </a:fontRef>
+        </p:style>
+        <p:txBody>
+          <a:bodyPr rtlCol="0" anchor="ctr"/>
+          <a:lstStyle/>
+          <a:p/>
+        </p:txBody>
+      </p:sp>
+      <p:sp>
+        <p:nvSpPr>
+          <p:cNvPr id="14" name="TextBox 13"/>
+          <p:cNvSpPr txBox="1"/>
+          <p:nvPr/>
+        </p:nvSpPr>
+        <p:spPr>
+          <a:xfrm>
+            <a:off x="658368" y="3273552"/>
+            <a:ext cx="786384" cy="274320"/>
+          </a:xfrm>
+          <a:prstGeom prst="rect">
+            <a:avLst/>
+          </a:prstGeom>
+          <a:noFill/>
+        </p:spPr>
+        <p:txBody>
+          <a:bodyPr wrap="square" anchor="t" lIns="0" rIns="0" tIns="0" bIns="0">
+            <a:spAutoFit/>
+          </a:bodyPr>
+          <a:lstStyle/>
+          <a:p>
+            <a:pPr algn="ctr">
+              <a:lnSpc>
+                <a:spcPct val="118000"/>
+              </a:lnSpc>
+              <a:spcAft>
+                <a:spcPts val="600"/>
+              </a:spcAft>
+            </a:pPr>
+            <a:r>
+              <a:rPr sz="1300" b="1" i="0">
+                <a:solidFill>
+                  <a:srgbClr val="FFFFFF"/>
+                </a:solidFill>
+                <a:latin typeface="Segoe UI"/>
+              </a:rPr>
+              <a:t>RO1</a:t>
+            </a:r>
+          </a:p>
+        </p:txBody>
+      </p:sp>
+      <p:sp>
+        <p:nvSpPr>
+          <p:cNvPr id="15" name="TextBox 14"/>
+          <p:cNvSpPr txBox="1"/>
+          <p:nvPr/>
+        </p:nvSpPr>
+        <p:spPr>
+          <a:xfrm>
+            <a:off x="1645920" y="3259836"/>
+            <a:ext cx="9594799" cy="365760"/>
+          </a:xfrm>
+          <a:prstGeom prst="rect">
+            <a:avLst/>
+          </a:prstGeom>
+          <a:noFill/>
+        </p:spPr>
+        <p:txBody>
+          <a:bodyPr wrap="square" anchor="t" lIns="0" rIns="0" tIns="0" bIns="0">
+            <a:spAutoFit/>
+          </a:bodyPr>
+          <a:lstStyle/>
+          <a:p>
+            <a:pPr algn="l">
+              <a:lnSpc>
+                <a:spcPct val="118000"/>
+              </a:lnSpc>
+              <a:spcAft>
+                <a:spcPts val="600"/>
+              </a:spcAft>
+            </a:pPr>
+            <a:r>
+              <a:rPr sz="1300" b="1" i="0">
+                <a:solidFill>
+                  <a:srgbClr val="0B2B4A"/>
+                </a:solidFill>
+                <a:latin typeface="Segoe UI"/>
+              </a:rPr>
+              <a:t>Identify  </a:t>
+            </a:r>
+            <a:r>
+              <a:rPr sz="1250" b="0" i="0">
+                <a:solidFill>
+                  <a:srgbClr val="243B53"/>
+                </a:solidFill>
+                <a:latin typeface="Segoe UI"/>
+              </a:rPr>
+              <a:t>the limitations of existing systems through a critical review, and derive design requirements from them</a:t>
+            </a:r>
+          </a:p>
+        </p:txBody>
+      </p:sp>
+      <p:sp>
+        <p:nvSpPr>
+          <p:cNvPr id="16" name="Rounded Rectangle 15"/>
+          <p:cNvSpPr/>
+          <p:nvPr/>
+        </p:nvSpPr>
+        <p:spPr>
+          <a:xfrm>
+            <a:off x="658368" y="3749040"/>
+            <a:ext cx="10874959" cy="548640"/>
+          </a:xfrm>
+          <a:prstGeom prst="roundRect">
+            <a:avLst>
+              <a:gd name="adj" fmla="val 10000"/>
+            </a:avLst>
+          </a:prstGeom>
+          <a:solidFill>
+            <a:srgbClr val="F3F8FB"/>
+          </a:solidFill>
+          <a:ln w="12700">
+            <a:solidFill>
+              <a:srgbClr val="D8E5EE"/>
+            </a:solidFill>
+          </a:ln>
+          <a:effectLst/>
+        </p:spPr>
+        <p:style>
+          <a:lnRef idx="1">
+            <a:schemeClr val="accent1"/>
+          </a:lnRef>
+          <a:fillRef idx="3">
+            <a:schemeClr val="accent1"/>
+          </a:fillRef>
+          <a:effectRef idx="2">
+            <a:schemeClr val="accent1"/>
+          </a:effectRef>
+          <a:fontRef idx="minor">
+            <a:schemeClr val="lt1"/>
+          </a:fontRef>
+        </p:style>
+        <p:txBody>
+          <a:bodyPr rtlCol="0" anchor="ctr"/>
+          <a:lstStyle/>
+          <a:p/>
+        </p:txBody>
+      </p:sp>
+      <p:sp>
+        <p:nvSpPr>
+          <p:cNvPr id="17" name="Rounded Rectangle 16"/>
+          <p:cNvSpPr/>
+          <p:nvPr/>
+        </p:nvSpPr>
+        <p:spPr>
+          <a:xfrm>
+            <a:off x="658368" y="3749040"/>
+            <a:ext cx="786384" cy="548640"/>
+          </a:xfrm>
+          <a:prstGeom prst="roundRect">
+            <a:avLst>
+              <a:gd name="adj" fmla="val 10000"/>
+            </a:avLst>
+          </a:prstGeom>
+          <a:solidFill>
+            <a:srgbClr val="0E5A72"/>
+          </a:solidFill>
+          <a:ln>
+            <a:noFill/>
+          </a:ln>
+          <a:effectLst/>
+        </p:spPr>
+        <p:style>
+          <a:lnRef idx="1">
+            <a:schemeClr val="accent1"/>
+          </a:lnRef>
+          <a:fillRef idx="3">
+            <a:schemeClr val="accent1"/>
+          </a:fillRef>
+          <a:effectRef idx="2">
+            <a:schemeClr val="accent1"/>
+          </a:effectRef>
+          <a:fontRef idx="minor">
+            <a:schemeClr val="lt1"/>
+          </a:fontRef>
+        </p:style>
+        <p:txBody>
+          <a:bodyPr rtlCol="0" anchor="ctr"/>
+          <a:lstStyle/>
+          <a:p/>
+        </p:txBody>
+      </p:sp>
+      <p:sp>
+        <p:nvSpPr>
+          <p:cNvPr id="18" name="TextBox 17"/>
+          <p:cNvSpPr txBox="1"/>
+          <p:nvPr/>
+        </p:nvSpPr>
+        <p:spPr>
+          <a:xfrm>
+            <a:off x="658368" y="3895344"/>
+            <a:ext cx="786384" cy="274320"/>
+          </a:xfrm>
+          <a:prstGeom prst="rect">
+            <a:avLst/>
+          </a:prstGeom>
+          <a:noFill/>
+        </p:spPr>
+        <p:txBody>
+          <a:bodyPr wrap="square" anchor="t" lIns="0" rIns="0" tIns="0" bIns="0">
+            <a:spAutoFit/>
+          </a:bodyPr>
+          <a:lstStyle/>
+          <a:p>
+            <a:pPr algn="ctr">
+              <a:lnSpc>
+                <a:spcPct val="118000"/>
+              </a:lnSpc>
+              <a:spcAft>
+                <a:spcPts val="600"/>
+              </a:spcAft>
+            </a:pPr>
+            <a:r>
+              <a:rPr sz="1300" b="1" i="0">
+                <a:solidFill>
+                  <a:srgbClr val="FFFFFF"/>
+                </a:solidFill>
+                <a:latin typeface="Segoe UI"/>
+              </a:rPr>
+              <a:t>RO2</a:t>
+            </a:r>
+          </a:p>
+        </p:txBody>
+      </p:sp>
+      <p:sp>
+        <p:nvSpPr>
+          <p:cNvPr id="19" name="TextBox 18"/>
+          <p:cNvSpPr txBox="1"/>
+          <p:nvPr/>
+        </p:nvSpPr>
+        <p:spPr>
+          <a:xfrm>
+            <a:off x="1645920" y="3881628"/>
+            <a:ext cx="9594799" cy="365760"/>
+          </a:xfrm>
+          <a:prstGeom prst="rect">
+            <a:avLst/>
+          </a:prstGeom>
+          <a:noFill/>
+        </p:spPr>
+        <p:txBody>
+          <a:bodyPr wrap="square" anchor="t" lIns="0" rIns="0" tIns="0" bIns="0">
+            <a:spAutoFit/>
+          </a:bodyPr>
+          <a:lstStyle/>
+          <a:p>
+            <a:pPr algn="l">
+              <a:lnSpc>
+                <a:spcPct val="118000"/>
+              </a:lnSpc>
+              <a:spcAft>
+                <a:spcPts val="600"/>
+              </a:spcAft>
+            </a:pPr>
+            <a:r>
+              <a:rPr sz="1300" b="1" i="0">
+                <a:solidFill>
+                  <a:srgbClr val="0B2B4A"/>
+                </a:solidFill>
+                <a:latin typeface="Segoe UI"/>
+              </a:rPr>
+              <a:t>Analyse  </a:t>
+            </a:r>
+            <a:r>
+              <a:rPr sz="1250" b="0" i="0">
+                <a:solidFill>
+                  <a:srgbClr val="243B53"/>
+                </a:solidFill>
+                <a:latin typeface="Segoe UI"/>
+              </a:rPr>
+              <a:t>three architectures under a common dataset, split and transfer learning protocol, with per class metrics</a:t>
+            </a:r>
+          </a:p>
+        </p:txBody>
+      </p:sp>
+      <p:sp>
+        <p:nvSpPr>
+          <p:cNvPr id="20" name="Rounded Rectangle 19"/>
+          <p:cNvSpPr/>
+          <p:nvPr/>
+        </p:nvSpPr>
+        <p:spPr>
+          <a:xfrm>
+            <a:off x="658368" y="4370832"/>
+            <a:ext cx="10874959" cy="548640"/>
+          </a:xfrm>
+          <a:prstGeom prst="roundRect">
+            <a:avLst>
+              <a:gd name="adj" fmla="val 10000"/>
+            </a:avLst>
+          </a:prstGeom>
+          <a:solidFill>
+            <a:srgbClr val="F3F8FB"/>
+          </a:solidFill>
+          <a:ln w="12700">
+            <a:solidFill>
+              <a:srgbClr val="D8E5EE"/>
+            </a:solidFill>
+          </a:ln>
+          <a:effectLst/>
+        </p:spPr>
+        <p:style>
+          <a:lnRef idx="1">
+            <a:schemeClr val="accent1"/>
+          </a:lnRef>
+          <a:fillRef idx="3">
+            <a:schemeClr val="accent1"/>
+          </a:fillRef>
+          <a:effectRef idx="2">
+            <a:schemeClr val="accent1"/>
+          </a:effectRef>
+          <a:fontRef idx="minor">
+            <a:schemeClr val="lt1"/>
+          </a:fontRef>
+        </p:style>
+        <p:txBody>
+          <a:bodyPr rtlCol="0" anchor="ctr"/>
+          <a:lstStyle/>
+          <a:p/>
+        </p:txBody>
+      </p:sp>
+      <p:sp>
+        <p:nvSpPr>
+          <p:cNvPr id="21" name="Rounded Rectangle 20"/>
+          <p:cNvSpPr/>
+          <p:nvPr/>
+        </p:nvSpPr>
+        <p:spPr>
+          <a:xfrm>
+            <a:off x="658368" y="4370832"/>
+            <a:ext cx="786384" cy="548640"/>
+          </a:xfrm>
+          <a:prstGeom prst="roundRect">
+            <a:avLst>
+              <a:gd name="adj" fmla="val 10000"/>
+            </a:avLst>
+          </a:prstGeom>
+          <a:solidFill>
+            <a:srgbClr val="0E5A72"/>
+          </a:solidFill>
+          <a:ln>
+            <a:noFill/>
+          </a:ln>
+          <a:effectLst/>
+        </p:spPr>
+        <p:style>
+          <a:lnRef idx="1">
+            <a:schemeClr val="accent1"/>
+          </a:lnRef>
+          <a:fillRef idx="3">
+            <a:schemeClr val="accent1"/>
+          </a:fillRef>
+          <a:effectRef idx="2">
+            <a:schemeClr val="accent1"/>
+          </a:effectRef>
+          <a:fontRef idx="minor">
+            <a:schemeClr val="lt1"/>
+          </a:fontRef>
+        </p:style>
+        <p:txBody>
+          <a:bodyPr rtlCol="0" anchor="ctr"/>
+          <a:lstStyle/>
+          <a:p/>
+        </p:txBody>
+      </p:sp>
+      <p:sp>
+        <p:nvSpPr>
+          <p:cNvPr id="22" name="TextBox 21"/>
+          <p:cNvSpPr txBox="1"/>
+          <p:nvPr/>
+        </p:nvSpPr>
+        <p:spPr>
+          <a:xfrm>
+            <a:off x="658368" y="4517136"/>
+            <a:ext cx="786384" cy="274320"/>
+          </a:xfrm>
+          <a:prstGeom prst="rect">
+            <a:avLst/>
+          </a:prstGeom>
+          <a:noFill/>
+        </p:spPr>
+        <p:txBody>
+          <a:bodyPr wrap="square" anchor="t" lIns="0" rIns="0" tIns="0" bIns="0">
+            <a:spAutoFit/>
+          </a:bodyPr>
+          <a:lstStyle/>
+          <a:p>
+            <a:pPr algn="ctr">
+              <a:lnSpc>
+                <a:spcPct val="118000"/>
+              </a:lnSpc>
+              <a:spcAft>
+                <a:spcPts val="600"/>
+              </a:spcAft>
+            </a:pPr>
+            <a:r>
+              <a:rPr sz="1300" b="1" i="0">
+                <a:solidFill>
+                  <a:srgbClr val="FFFFFF"/>
+                </a:solidFill>
+                <a:latin typeface="Segoe UI"/>
+              </a:rPr>
+              <a:t>RO3</a:t>
+            </a:r>
+          </a:p>
+        </p:txBody>
+      </p:sp>
+      <p:sp>
+        <p:nvSpPr>
+          <p:cNvPr id="23" name="TextBox 22"/>
+          <p:cNvSpPr txBox="1"/>
+          <p:nvPr/>
+        </p:nvSpPr>
+        <p:spPr>
+          <a:xfrm>
+            <a:off x="1645920" y="4503420"/>
+            <a:ext cx="9594799" cy="365760"/>
+          </a:xfrm>
+          <a:prstGeom prst="rect">
+            <a:avLst/>
+          </a:prstGeom>
+          <a:noFill/>
+        </p:spPr>
+        <p:txBody>
+          <a:bodyPr wrap="square" anchor="t" lIns="0" rIns="0" tIns="0" bIns="0">
+            <a:spAutoFit/>
+          </a:bodyPr>
+          <a:lstStyle/>
+          <a:p>
+            <a:pPr algn="l">
+              <a:lnSpc>
+                <a:spcPct val="118000"/>
+              </a:lnSpc>
+              <a:spcAft>
+                <a:spcPts val="600"/>
+              </a:spcAft>
+            </a:pPr>
+            <a:r>
+              <a:rPr sz="1300" b="1" i="0">
+                <a:solidFill>
+                  <a:srgbClr val="0B2B4A"/>
+                </a:solidFill>
+                <a:latin typeface="Segoe UI"/>
+              </a:rPr>
+              <a:t>Design and develop  </a:t>
+            </a:r>
+            <a:r>
+              <a:rPr sz="1250" b="0" i="0">
+                <a:solidFill>
+                  <a:srgbClr val="243B53"/>
+                </a:solidFill>
+                <a:latin typeface="Segoe UI"/>
+              </a:rPr>
+              <a:t>a post hoc safeguard that assesses input validity without retraining, integrated end to end</a:t>
+            </a:r>
+          </a:p>
+        </p:txBody>
+      </p:sp>
+      <p:sp>
+        <p:nvSpPr>
+          <p:cNvPr id="24" name="Rounded Rectangle 23"/>
+          <p:cNvSpPr/>
+          <p:nvPr/>
+        </p:nvSpPr>
+        <p:spPr>
+          <a:xfrm>
+            <a:off x="658368" y="4992624"/>
+            <a:ext cx="10874959" cy="548640"/>
+          </a:xfrm>
+          <a:prstGeom prst="roundRect">
+            <a:avLst>
+              <a:gd name="adj" fmla="val 10000"/>
+            </a:avLst>
+          </a:prstGeom>
+          <a:solidFill>
+            <a:srgbClr val="F3F8FB"/>
+          </a:solidFill>
+          <a:ln w="12700">
+            <a:solidFill>
+              <a:srgbClr val="D8E5EE"/>
+            </a:solidFill>
+          </a:ln>
+          <a:effectLst/>
+        </p:spPr>
+        <p:style>
+          <a:lnRef idx="1">
+            <a:schemeClr val="accent1"/>
+          </a:lnRef>
+          <a:fillRef idx="3">
+            <a:schemeClr val="accent1"/>
+          </a:fillRef>
+          <a:effectRef idx="2">
+            <a:schemeClr val="accent1"/>
+          </a:effectRef>
+          <a:fontRef idx="minor">
+            <a:schemeClr val="lt1"/>
+          </a:fontRef>
+        </p:style>
+        <p:txBody>
+          <a:bodyPr rtlCol="0" anchor="ctr"/>
+          <a:lstStyle/>
+          <a:p/>
+        </p:txBody>
+      </p:sp>
+      <p:sp>
+        <p:nvSpPr>
+          <p:cNvPr id="25" name="Rounded Rectangle 24"/>
+          <p:cNvSpPr/>
+          <p:nvPr/>
+        </p:nvSpPr>
+        <p:spPr>
+          <a:xfrm>
+            <a:off x="658368" y="4992624"/>
+            <a:ext cx="786384" cy="548640"/>
+          </a:xfrm>
+          <a:prstGeom prst="roundRect">
+            <a:avLst>
+              <a:gd name="adj" fmla="val 10000"/>
+            </a:avLst>
+          </a:prstGeom>
+          <a:solidFill>
+            <a:srgbClr val="0E5A72"/>
+          </a:solidFill>
+          <a:ln>
+            <a:noFill/>
+          </a:ln>
+          <a:effectLst/>
+        </p:spPr>
+        <p:style>
+          <a:lnRef idx="1">
+            <a:schemeClr val="accent1"/>
+          </a:lnRef>
+          <a:fillRef idx="3">
+            <a:schemeClr val="accent1"/>
+          </a:fillRef>
+          <a:effectRef idx="2">
+            <a:schemeClr val="accent1"/>
+          </a:effectRef>
+          <a:fontRef idx="minor">
+            <a:schemeClr val="lt1"/>
+          </a:fontRef>
+        </p:style>
+        <p:txBody>
+          <a:bodyPr rtlCol="0" anchor="ctr"/>
+          <a:lstStyle/>
+          <a:p/>
+        </p:txBody>
+      </p:sp>
+      <p:sp>
+        <p:nvSpPr>
+          <p:cNvPr id="26" name="TextBox 25"/>
+          <p:cNvSpPr txBox="1"/>
+          <p:nvPr/>
+        </p:nvSpPr>
+        <p:spPr>
+          <a:xfrm>
+            <a:off x="658368" y="5138928"/>
+            <a:ext cx="786384" cy="274320"/>
+          </a:xfrm>
+          <a:prstGeom prst="rect">
+            <a:avLst/>
+          </a:prstGeom>
+          <a:noFill/>
+        </p:spPr>
+        <p:txBody>
+          <a:bodyPr wrap="square" anchor="t" lIns="0" rIns="0" tIns="0" bIns="0">
+            <a:spAutoFit/>
+          </a:bodyPr>
+          <a:lstStyle/>
+          <a:p>
+            <a:pPr algn="ctr">
+              <a:lnSpc>
+                <a:spcPct val="118000"/>
+              </a:lnSpc>
+              <a:spcAft>
+                <a:spcPts val="600"/>
+              </a:spcAft>
+            </a:pPr>
+            <a:r>
+              <a:rPr sz="1300" b="1" i="0">
+                <a:solidFill>
+                  <a:srgbClr val="FFFFFF"/>
+                </a:solidFill>
+                <a:latin typeface="Segoe UI"/>
+              </a:rPr>
+              <a:t>RO4</a:t>
+            </a:r>
+          </a:p>
+        </p:txBody>
+      </p:sp>
+      <p:sp>
+        <p:nvSpPr>
+          <p:cNvPr id="27" name="TextBox 26"/>
+          <p:cNvSpPr txBox="1"/>
+          <p:nvPr/>
+        </p:nvSpPr>
+        <p:spPr>
+          <a:xfrm>
+            <a:off x="1645920" y="5125212"/>
+            <a:ext cx="9594799" cy="365760"/>
+          </a:xfrm>
+          <a:prstGeom prst="rect">
+            <a:avLst/>
+          </a:prstGeom>
+          <a:noFill/>
+        </p:spPr>
+        <p:txBody>
+          <a:bodyPr wrap="square" anchor="t" lIns="0" rIns="0" tIns="0" bIns="0">
+            <a:spAutoFit/>
+          </a:bodyPr>
+          <a:lstStyle/>
+          <a:p>
+            <a:pPr algn="l">
+              <a:lnSpc>
+                <a:spcPct val="118000"/>
+              </a:lnSpc>
+              <a:spcAft>
+                <a:spcPts val="600"/>
+              </a:spcAft>
+            </a:pPr>
+            <a:r>
+              <a:rPr sz="1300" b="1" i="0">
+                <a:solidFill>
+                  <a:srgbClr val="0B2B4A"/>
+                </a:solidFill>
+                <a:latin typeface="Segoe UI"/>
+              </a:rPr>
+              <a:t>Evaluate  </a:t>
+            </a:r>
+            <a:r>
+              <a:rPr sz="1250" b="0" i="0">
+                <a:solidFill>
+                  <a:srgbClr val="243B53"/>
+                </a:solidFill>
+                <a:latin typeface="Segoe UI"/>
+              </a:rPr>
+              <a:t>the safeguard and the explanation: retention, separability, and where attention falls</a:t>
+            </a:r>
+          </a:p>
+        </p:txBody>
+      </p:sp>
+      <p:sp>
+        <p:nvSpPr>
+          <p:cNvPr id="28" name="Rounded Rectangle 27"/>
+          <p:cNvSpPr/>
+          <p:nvPr/>
+        </p:nvSpPr>
+        <p:spPr>
+          <a:xfrm>
+            <a:off x="658368" y="5614416"/>
+            <a:ext cx="10874959" cy="548640"/>
+          </a:xfrm>
+          <a:prstGeom prst="roundRect">
+            <a:avLst>
+              <a:gd name="adj" fmla="val 10000"/>
+            </a:avLst>
+          </a:prstGeom>
+          <a:solidFill>
+            <a:srgbClr val="F3F8FB"/>
+          </a:solidFill>
+          <a:ln w="12700">
+            <a:solidFill>
+              <a:srgbClr val="D8E5EE"/>
+            </a:solidFill>
+          </a:ln>
+          <a:effectLst/>
+        </p:spPr>
+        <p:style>
+          <a:lnRef idx="1">
+            <a:schemeClr val="accent1"/>
+          </a:lnRef>
+          <a:fillRef idx="3">
+            <a:schemeClr val="accent1"/>
+          </a:fillRef>
+          <a:effectRef idx="2">
+            <a:schemeClr val="accent1"/>
+          </a:effectRef>
+          <a:fontRef idx="minor">
+            <a:schemeClr val="lt1"/>
+          </a:fontRef>
+        </p:style>
+        <p:txBody>
+          <a:bodyPr rtlCol="0" anchor="ctr"/>
+          <a:lstStyle/>
+          <a:p/>
+        </p:txBody>
+      </p:sp>
+      <p:sp>
+        <p:nvSpPr>
+          <p:cNvPr id="29" name="Rounded Rectangle 28"/>
+          <p:cNvSpPr/>
+          <p:nvPr/>
+        </p:nvSpPr>
+        <p:spPr>
+          <a:xfrm>
+            <a:off x="658368" y="5614416"/>
+            <a:ext cx="786384" cy="548640"/>
+          </a:xfrm>
+          <a:prstGeom prst="roundRect">
+            <a:avLst>
+              <a:gd name="adj" fmla="val 10000"/>
+            </a:avLst>
+          </a:prstGeom>
+          <a:solidFill>
+            <a:srgbClr val="0E5A72"/>
+          </a:solidFill>
+          <a:ln>
+            <a:noFill/>
+          </a:ln>
+          <a:effectLst/>
+        </p:spPr>
+        <p:style>
+          <a:lnRef idx="1">
+            <a:schemeClr val="accent1"/>
+          </a:lnRef>
+          <a:fillRef idx="3">
+            <a:schemeClr val="accent1"/>
+          </a:fillRef>
+          <a:effectRef idx="2">
+            <a:schemeClr val="accent1"/>
+          </a:effectRef>
+          <a:fontRef idx="minor">
+            <a:schemeClr val="lt1"/>
+          </a:fontRef>
+        </p:style>
+        <p:txBody>
+          <a:bodyPr rtlCol="0" anchor="ctr"/>
+          <a:lstStyle/>
+          <a:p/>
+        </p:txBody>
+      </p:sp>
+      <p:sp>
+        <p:nvSpPr>
+          <p:cNvPr id="30" name="TextBox 29"/>
+          <p:cNvSpPr txBox="1"/>
+          <p:nvPr/>
+        </p:nvSpPr>
+        <p:spPr>
+          <a:xfrm>
+            <a:off x="658368" y="5760720"/>
+            <a:ext cx="786384" cy="274320"/>
+          </a:xfrm>
+          <a:prstGeom prst="rect">
+            <a:avLst/>
+          </a:prstGeom>
+          <a:noFill/>
+        </p:spPr>
+        <p:txBody>
+          <a:bodyPr wrap="square" anchor="t" lIns="0" rIns="0" tIns="0" bIns="0">
+            <a:spAutoFit/>
+          </a:bodyPr>
+          <a:lstStyle/>
+          <a:p>
+            <a:pPr algn="ctr">
+              <a:lnSpc>
+                <a:spcPct val="118000"/>
+              </a:lnSpc>
+              <a:spcAft>
+                <a:spcPts val="600"/>
+              </a:spcAft>
+            </a:pPr>
+            <a:r>
+              <a:rPr sz="1300" b="1" i="0">
+                <a:solidFill>
+                  <a:srgbClr val="FFFFFF"/>
+                </a:solidFill>
+                <a:latin typeface="Segoe UI"/>
+              </a:rPr>
+              <a:t>RO5</a:t>
+            </a:r>
+          </a:p>
+        </p:txBody>
+      </p:sp>
+      <p:sp>
+        <p:nvSpPr>
+          <p:cNvPr id="31" name="TextBox 30"/>
+          <p:cNvSpPr txBox="1"/>
+          <p:nvPr/>
+        </p:nvSpPr>
+        <p:spPr>
+          <a:xfrm>
+            <a:off x="1645920" y="5747004"/>
+            <a:ext cx="9594799" cy="365760"/>
+          </a:xfrm>
+          <a:prstGeom prst="rect">
+            <a:avLst/>
+          </a:prstGeom>
+          <a:noFill/>
+        </p:spPr>
+        <p:txBody>
+          <a:bodyPr wrap="square" anchor="t" lIns="0" rIns="0" tIns="0" bIns="0">
+            <a:spAutoFit/>
+          </a:bodyPr>
+          <a:lstStyle/>
+          <a:p>
+            <a:pPr algn="l">
+              <a:lnSpc>
+                <a:spcPct val="118000"/>
+              </a:lnSpc>
+              <a:spcAft>
+                <a:spcPts val="600"/>
+              </a:spcAft>
+            </a:pPr>
+            <a:r>
+              <a:rPr sz="1300" b="1" i="0">
+                <a:solidFill>
+                  <a:srgbClr val="0B2B4A"/>
+                </a:solidFill>
+                <a:latin typeface="Segoe UI"/>
+              </a:rPr>
+              <a:t>Recommend  </a:t>
+            </a:r>
+            <a:r>
+              <a:rPr sz="1250" b="0" i="0">
+                <a:solidFill>
+                  <a:srgbClr val="243B53"/>
+                </a:solidFill>
+                <a:latin typeface="Segoe UI"/>
+              </a:rPr>
+              <a:t>the conditions under which such a framework is, and is not, suitable for screening and triage</a:t>
             </a:r>
           </a:p>
         </p:txBody>
